--- a/public/fun/pack/pptx/family/가족소개_22_아이와함께_섬마을선착장.pptx
+++ b/public/fun/pack/pptx/family/가족소개_22_아이와함께_섬마을선착장.pptx
@@ -3286,14 +3286,6 @@
 <file path=ppt/slides/slide1.xml><?xml version="1.0" encoding="utf-8"?>
 <p:sld xmlns:a="http://schemas.openxmlformats.org/drawingml/2006/main" xmlns:p="http://schemas.openxmlformats.org/presentationml/2006/main" xmlns:r="http://schemas.openxmlformats.org/officeDocument/2006/relationships">
   <p:cSld>
-    <p:bg>
-      <p:bgPr>
-        <a:solidFill>
-          <a:srgbClr val="EFF5FA"/>
-        </a:solidFill>
-        <a:effectLst/>
-      </p:bgPr>
-    </p:bg>
     <p:spTree>
       <p:nvGrpSpPr>
         <p:cNvPr id="1" name=""/>
@@ -3301,157 +3293,30 @@
         <p:nvPr/>
       </p:nvGrpSpPr>
       <p:grpSpPr/>
-      <p:sp>
-        <p:nvSpPr>
-          <p:cNvPr id="3" name="장식"/>
-          <p:cNvSpPr/>
+      <p:pic>
+        <p:nvPicPr>
+          <p:cNvPr id="3" name="표지 그림" descr="family-22.jpg"/>
+          <p:cNvPicPr>
+            <a:picLocks noChangeAspect="1"/>
+          </p:cNvPicPr>
           <p:nvPr/>
-        </p:nvSpPr>
-        <p:spPr>
-          <a:xfrm>
-            <a:off x="7315017" y="960120"/>
-            <a:ext cx="3657508" cy="5897880"/>
-          </a:xfrm>
-          <a:prstGeom prst="round2SameRect">
-            <a:avLst>
-              <a:gd name="adj1" fmla="val 50000"/>
-              <a:gd name="adj2" fmla="val 0"/>
-            </a:avLst>
-          </a:prstGeom>
-          <a:solidFill>
-            <a:srgbClr val="CEE2F3"/>
-          </a:solidFill>
-          <a:ln>
-            <a:noFill/>
-          </a:ln>
-        </p:spPr>
-        <p:txBody>
-          <a:bodyPr rtlCol="0" anchor="ctr"/>
-          <a:lstStyle/>
-          <a:p>
-            <a:pPr algn="ctr"/>
-          </a:p>
-        </p:txBody>
-      </p:sp>
-      <p:sp>
-        <p:nvSpPr>
-          <p:cNvPr id="4" name="장식"/>
-          <p:cNvSpPr/>
-          <p:nvPr/>
-        </p:nvSpPr>
-        <p:spPr>
-          <a:xfrm>
-            <a:off x="7924601" y="1783080"/>
-            <a:ext cx="2438339" cy="5074920"/>
-          </a:xfrm>
-          <a:prstGeom prst="round2SameRect">
-            <a:avLst>
-              <a:gd name="adj1" fmla="val 50000"/>
-              <a:gd name="adj2" fmla="val 0"/>
-            </a:avLst>
-          </a:prstGeom>
-          <a:solidFill>
-            <a:srgbClr val="275A86"/>
-          </a:solidFill>
-          <a:ln>
-            <a:noFill/>
-          </a:ln>
-        </p:spPr>
-        <p:txBody>
-          <a:bodyPr rtlCol="0" anchor="ctr"/>
-          <a:lstStyle/>
-          <a:p>
-            <a:pPr algn="ctr"/>
-          </a:p>
-        </p:txBody>
-      </p:sp>
-      <p:sp>
-        <p:nvSpPr>
-          <p:cNvPr id="5" name="장식"/>
-          <p:cNvSpPr/>
-          <p:nvPr/>
-        </p:nvSpPr>
-        <p:spPr>
-          <a:xfrm>
-            <a:off x="8046518" y="3017533"/>
-            <a:ext cx="2194505" cy="548626"/>
-          </a:xfrm>
-          <a:prstGeom prst="wave">
+        </p:nvPicPr>
+        <p:blipFill>
+          <a:blip r:embed="rId2"/>
+          <a:stretch>
+            <a:fillRect/>
+          </a:stretch>
+        </p:blipFill>
+        <p:spPr>
+          <a:xfrm>
+            <a:off x="0" y="0"/>
+            <a:ext cx="12191695" cy="6858000"/>
+          </a:xfrm>
+          <a:prstGeom prst="rect">
             <a:avLst/>
           </a:prstGeom>
-          <a:solidFill>
-            <a:srgbClr val="CEE2F3"/>
-          </a:solidFill>
-          <a:ln>
-            <a:noFill/>
-          </a:ln>
-        </p:spPr>
-        <p:txBody>
-          <a:bodyPr rtlCol="0" anchor="ctr"/>
-          <a:lstStyle/>
-          <a:p>
-            <a:pPr algn="ctr"/>
-          </a:p>
-        </p:txBody>
-      </p:sp>
-      <p:sp>
-        <p:nvSpPr>
-          <p:cNvPr id="6" name="장식"/>
-          <p:cNvSpPr/>
-          <p:nvPr/>
-        </p:nvSpPr>
-        <p:spPr>
-          <a:xfrm>
-            <a:off x="8046518" y="3493009"/>
-            <a:ext cx="2194505" cy="548626"/>
-          </a:xfrm>
-          <a:prstGeom prst="wave">
-            <a:avLst/>
-          </a:prstGeom>
-          <a:solidFill>
-            <a:srgbClr val="FFFFFF"/>
-          </a:solidFill>
-          <a:ln>
-            <a:noFill/>
-          </a:ln>
-        </p:spPr>
-        <p:txBody>
-          <a:bodyPr rtlCol="0" anchor="ctr"/>
-          <a:lstStyle/>
-          <a:p>
-            <a:pPr algn="ctr"/>
-          </a:p>
-        </p:txBody>
-      </p:sp>
-      <p:sp>
-        <p:nvSpPr>
-          <p:cNvPr id="7" name="장식"/>
-          <p:cNvSpPr/>
-          <p:nvPr/>
-        </p:nvSpPr>
-        <p:spPr>
-          <a:xfrm>
-            <a:off x="8046518" y="3968485"/>
-            <a:ext cx="2194505" cy="548626"/>
-          </a:xfrm>
-          <a:prstGeom prst="wave">
-            <a:avLst/>
-          </a:prstGeom>
-          <a:solidFill>
-            <a:srgbClr val="913B3E"/>
-          </a:solidFill>
-          <a:ln>
-            <a:noFill/>
-          </a:ln>
-        </p:spPr>
-        <p:txBody>
-          <a:bodyPr rtlCol="0" anchor="ctr"/>
-          <a:lstStyle/>
-          <a:p>
-            <a:pPr algn="ctr"/>
-          </a:p>
-        </p:txBody>
-      </p:sp>
+        </p:spPr>
+      </p:pic>
       <p:sp>
         <p:nvSpPr>
           <p:cNvPr id="2" name="Title 1"/>
@@ -3492,14 +3357,14 @@
       </p:sp>
       <p:sp>
         <p:nvSpPr>
-          <p:cNvPr id="8" name="한 줄 문구"/>
+          <p:cNvPr id="4" name="한 줄 문구"/>
           <p:cNvSpPr txBox="1"/>
           <p:nvPr/>
         </p:nvSpPr>
         <p:spPr>
           <a:xfrm>
-            <a:off x="853418" y="3703320"/>
-            <a:ext cx="5852013" cy="822960"/>
+            <a:off x="853418" y="3749039"/>
+            <a:ext cx="6095847" cy="822960"/>
           </a:xfrm>
           <a:prstGeom prst="rect">
             <a:avLst/>
@@ -3523,21 +3388,21 @@
                   <a:srgbClr val="122A3F"/>
                 </a:solidFill>
               </a:rPr>
-              <a:t>섬 여행에서 웃음이 끊이지 않던 우리</a:t>
-            </a:r>
-          </a:p>
-        </p:txBody>
-      </p:sp>
-      <p:sp>
-        <p:nvSpPr>
-          <p:cNvPr id="9" name="안내 문구"/>
+              <a:t>섬 가는 배를 기다리던 선착장</a:t>
+            </a:r>
+          </a:p>
+        </p:txBody>
+      </p:sp>
+      <p:sp>
+        <p:nvSpPr>
+          <p:cNvPr id="5" name="안내 문구"/>
           <p:cNvSpPr txBox="1"/>
           <p:nvPr/>
         </p:nvSpPr>
         <p:spPr>
           <a:xfrm>
-            <a:off x="853418" y="4572000"/>
-            <a:ext cx="5852013" cy="914400"/>
+            <a:off x="853418" y="4617720"/>
+            <a:ext cx="6095847" cy="914400"/>
           </a:xfrm>
           <a:prstGeom prst="rect">
             <a:avLst/>
@@ -3561,7 +3426,7 @@
                   <a:srgbClr val="666666"/>
                 </a:solidFill>
               </a:rPr>
-              <a:t>아이와 함께 · 2026. 00. 00</a:t>
+              <a:t>아이와 함께 · 2027. 00. 00</a:t>
             </a:r>
           </a:p>
         </p:txBody>
@@ -3626,93 +3491,6 @@
       </p:sp>
       <p:sp>
         <p:nvSpPr>
-          <p:cNvPr id="4" name="장식"/>
-          <p:cNvSpPr/>
-          <p:nvPr/>
-        </p:nvSpPr>
-        <p:spPr>
-          <a:xfrm>
-            <a:off x="10655503" y="557784"/>
-            <a:ext cx="877824" cy="219456"/>
-          </a:xfrm>
-          <a:prstGeom prst="wave">
-            <a:avLst/>
-          </a:prstGeom>
-          <a:solidFill>
-            <a:srgbClr val="CEE2F3"/>
-          </a:solidFill>
-          <a:ln>
-            <a:noFill/>
-          </a:ln>
-        </p:spPr>
-        <p:txBody>
-          <a:bodyPr rtlCol="0" anchor="ctr"/>
-          <a:lstStyle/>
-          <a:p>
-            <a:pPr algn="ctr"/>
-          </a:p>
-        </p:txBody>
-      </p:sp>
-      <p:sp>
-        <p:nvSpPr>
-          <p:cNvPr id="5" name="장식"/>
-          <p:cNvSpPr/>
-          <p:nvPr/>
-        </p:nvSpPr>
-        <p:spPr>
-          <a:xfrm>
-            <a:off x="10655503" y="747979"/>
-            <a:ext cx="877824" cy="219456"/>
-          </a:xfrm>
-          <a:prstGeom prst="wave">
-            <a:avLst/>
-          </a:prstGeom>
-          <a:solidFill>
-            <a:srgbClr val="275A86"/>
-          </a:solidFill>
-          <a:ln>
-            <a:noFill/>
-          </a:ln>
-        </p:spPr>
-        <p:txBody>
-          <a:bodyPr rtlCol="0" anchor="ctr"/>
-          <a:lstStyle/>
-          <a:p>
-            <a:pPr algn="ctr"/>
-          </a:p>
-        </p:txBody>
-      </p:sp>
-      <p:sp>
-        <p:nvSpPr>
-          <p:cNvPr id="6" name="장식"/>
-          <p:cNvSpPr/>
-          <p:nvPr/>
-        </p:nvSpPr>
-        <p:spPr>
-          <a:xfrm>
-            <a:off x="10655503" y="938174"/>
-            <a:ext cx="877824" cy="219456"/>
-          </a:xfrm>
-          <a:prstGeom prst="wave">
-            <a:avLst/>
-          </a:prstGeom>
-          <a:solidFill>
-            <a:srgbClr val="913B3E"/>
-          </a:solidFill>
-          <a:ln>
-            <a:noFill/>
-          </a:ln>
-        </p:spPr>
-        <p:txBody>
-          <a:bodyPr rtlCol="0" anchor="ctr"/>
-          <a:lstStyle/>
-          <a:p>
-            <a:pPr algn="ctr"/>
-          </a:p>
-        </p:txBody>
-      </p:sp>
-      <p:sp>
-        <p:nvSpPr>
           <p:cNvPr id="2" name="Title 1"/>
           <p:cNvSpPr>
             <a:spLocks noGrp="1"/>
@@ -3751,7 +3529,7 @@
       </p:sp>
       <p:sp>
         <p:nvSpPr>
-          <p:cNvPr id="7" name="사진 자리"/>
+          <p:cNvPr id="4" name="사진 자리"/>
           <p:cNvSpPr/>
           <p:nvPr/>
         </p:nvSpPr>
@@ -3797,7 +3575,7 @@
       </p:sp>
       <p:sp>
         <p:nvSpPr>
-          <p:cNvPr id="8" name="TextBox 7"/>
+          <p:cNvPr id="5" name="TextBox 4"/>
           <p:cNvSpPr txBox="1"/>
           <p:nvPr/>
         </p:nvSpPr>
@@ -3835,7 +3613,7 @@
       </p:sp>
       <p:sp>
         <p:nvSpPr>
-          <p:cNvPr id="9" name="TextBox 8"/>
+          <p:cNvPr id="6" name="TextBox 5"/>
           <p:cNvSpPr txBox="1"/>
           <p:nvPr/>
         </p:nvSpPr>
@@ -3903,7 +3681,7 @@
       </p:sp>
       <p:sp>
         <p:nvSpPr>
-          <p:cNvPr id="10" name="사진 자리"/>
+          <p:cNvPr id="7" name="사진 자리"/>
           <p:cNvSpPr/>
           <p:nvPr/>
         </p:nvSpPr>
@@ -3949,7 +3727,7 @@
       </p:sp>
       <p:sp>
         <p:nvSpPr>
-          <p:cNvPr id="11" name="TextBox 10"/>
+          <p:cNvPr id="8" name="TextBox 7"/>
           <p:cNvSpPr txBox="1"/>
           <p:nvPr/>
         </p:nvSpPr>
@@ -3987,7 +3765,7 @@
       </p:sp>
       <p:sp>
         <p:nvSpPr>
-          <p:cNvPr id="12" name="TextBox 11"/>
+          <p:cNvPr id="9" name="TextBox 8"/>
           <p:cNvSpPr txBox="1"/>
           <p:nvPr/>
         </p:nvSpPr>
@@ -4055,7 +3833,7 @@
       </p:sp>
       <p:sp>
         <p:nvSpPr>
-          <p:cNvPr id="13" name="사진 자리"/>
+          <p:cNvPr id="10" name="사진 자리"/>
           <p:cNvSpPr/>
           <p:nvPr/>
         </p:nvSpPr>
@@ -4101,7 +3879,7 @@
       </p:sp>
       <p:sp>
         <p:nvSpPr>
-          <p:cNvPr id="14" name="TextBox 13"/>
+          <p:cNvPr id="11" name="TextBox 10"/>
           <p:cNvSpPr txBox="1"/>
           <p:nvPr/>
         </p:nvSpPr>
@@ -4139,7 +3917,7 @@
       </p:sp>
       <p:sp>
         <p:nvSpPr>
-          <p:cNvPr id="15" name="TextBox 14"/>
+          <p:cNvPr id="12" name="TextBox 11"/>
           <p:cNvSpPr txBox="1"/>
           <p:nvPr/>
         </p:nvSpPr>
@@ -4207,7 +3985,7 @@
       </p:sp>
       <p:sp>
         <p:nvSpPr>
-          <p:cNvPr id="16" name="사진 자리"/>
+          <p:cNvPr id="13" name="사진 자리"/>
           <p:cNvSpPr/>
           <p:nvPr/>
         </p:nvSpPr>
@@ -4253,7 +4031,7 @@
       </p:sp>
       <p:sp>
         <p:nvSpPr>
-          <p:cNvPr id="17" name="TextBox 16"/>
+          <p:cNvPr id="14" name="TextBox 13"/>
           <p:cNvSpPr txBox="1"/>
           <p:nvPr/>
         </p:nvSpPr>
@@ -4291,7 +4069,7 @@
       </p:sp>
       <p:sp>
         <p:nvSpPr>
-          <p:cNvPr id="18" name="TextBox 17"/>
+          <p:cNvPr id="15" name="TextBox 14"/>
           <p:cNvSpPr txBox="1"/>
           <p:nvPr/>
         </p:nvSpPr>
@@ -4417,93 +4195,6 @@
       </p:sp>
       <p:sp>
         <p:nvSpPr>
-          <p:cNvPr id="4" name="장식"/>
-          <p:cNvSpPr/>
-          <p:nvPr/>
-        </p:nvSpPr>
-        <p:spPr>
-          <a:xfrm>
-            <a:off x="10655503" y="557784"/>
-            <a:ext cx="877824" cy="219456"/>
-          </a:xfrm>
-          <a:prstGeom prst="wave">
-            <a:avLst/>
-          </a:prstGeom>
-          <a:solidFill>
-            <a:srgbClr val="CEE2F3"/>
-          </a:solidFill>
-          <a:ln>
-            <a:noFill/>
-          </a:ln>
-        </p:spPr>
-        <p:txBody>
-          <a:bodyPr rtlCol="0" anchor="ctr"/>
-          <a:lstStyle/>
-          <a:p>
-            <a:pPr algn="ctr"/>
-          </a:p>
-        </p:txBody>
-      </p:sp>
-      <p:sp>
-        <p:nvSpPr>
-          <p:cNvPr id="5" name="장식"/>
-          <p:cNvSpPr/>
-          <p:nvPr/>
-        </p:nvSpPr>
-        <p:spPr>
-          <a:xfrm>
-            <a:off x="10655503" y="747979"/>
-            <a:ext cx="877824" cy="219456"/>
-          </a:xfrm>
-          <a:prstGeom prst="wave">
-            <a:avLst/>
-          </a:prstGeom>
-          <a:solidFill>
-            <a:srgbClr val="275A86"/>
-          </a:solidFill>
-          <a:ln>
-            <a:noFill/>
-          </a:ln>
-        </p:spPr>
-        <p:txBody>
-          <a:bodyPr rtlCol="0" anchor="ctr"/>
-          <a:lstStyle/>
-          <a:p>
-            <a:pPr algn="ctr"/>
-          </a:p>
-        </p:txBody>
-      </p:sp>
-      <p:sp>
-        <p:nvSpPr>
-          <p:cNvPr id="6" name="장식"/>
-          <p:cNvSpPr/>
-          <p:nvPr/>
-        </p:nvSpPr>
-        <p:spPr>
-          <a:xfrm>
-            <a:off x="10655503" y="938174"/>
-            <a:ext cx="877824" cy="219456"/>
-          </a:xfrm>
-          <a:prstGeom prst="wave">
-            <a:avLst/>
-          </a:prstGeom>
-          <a:solidFill>
-            <a:srgbClr val="913B3E"/>
-          </a:solidFill>
-          <a:ln>
-            <a:noFill/>
-          </a:ln>
-        </p:spPr>
-        <p:txBody>
-          <a:bodyPr rtlCol="0" anchor="ctr"/>
-          <a:lstStyle/>
-          <a:p>
-            <a:pPr algn="ctr"/>
-          </a:p>
-        </p:txBody>
-      </p:sp>
-      <p:sp>
-        <p:nvSpPr>
           <p:cNvPr id="2" name="Title 1"/>
           <p:cNvSpPr>
             <a:spLocks noGrp="1"/>
@@ -4542,7 +4233,7 @@
       </p:sp>
       <p:sp>
         <p:nvSpPr>
-          <p:cNvPr id="7" name="타임라인 선"/>
+          <p:cNvPr id="4" name="타임라인 선"/>
           <p:cNvSpPr/>
           <p:nvPr/>
         </p:nvSpPr>
@@ -4571,7 +4262,7 @@
       </p:sp>
       <p:sp>
         <p:nvSpPr>
-          <p:cNvPr id="8" name="때 1"/>
+          <p:cNvPr id="5" name="때 1"/>
           <p:cNvSpPr/>
           <p:nvPr/>
         </p:nvSpPr>
@@ -4602,7 +4293,7 @@
       </p:sp>
       <p:sp>
         <p:nvSpPr>
-          <p:cNvPr id="9" name="TextBox 8"/>
+          <p:cNvPr id="6" name="TextBox 5"/>
           <p:cNvSpPr txBox="1"/>
           <p:nvPr/>
         </p:nvSpPr>
@@ -4640,7 +4331,7 @@
       </p:sp>
       <p:sp>
         <p:nvSpPr>
-          <p:cNvPr id="10" name="TextBox 9"/>
+          <p:cNvPr id="7" name="TextBox 6"/>
           <p:cNvSpPr txBox="1"/>
           <p:nvPr/>
         </p:nvSpPr>
@@ -4678,7 +4369,7 @@
       </p:sp>
       <p:sp>
         <p:nvSpPr>
-          <p:cNvPr id="11" name="TextBox 10"/>
+          <p:cNvPr id="8" name="TextBox 7"/>
           <p:cNvSpPr txBox="1"/>
           <p:nvPr/>
         </p:nvSpPr>
@@ -4716,7 +4407,7 @@
       </p:sp>
       <p:sp>
         <p:nvSpPr>
-          <p:cNvPr id="12" name="때 2"/>
+          <p:cNvPr id="9" name="때 2"/>
           <p:cNvSpPr/>
           <p:nvPr/>
         </p:nvSpPr>
@@ -4747,7 +4438,7 @@
       </p:sp>
       <p:sp>
         <p:nvSpPr>
-          <p:cNvPr id="13" name="TextBox 12"/>
+          <p:cNvPr id="10" name="TextBox 9"/>
           <p:cNvSpPr txBox="1"/>
           <p:nvPr/>
         </p:nvSpPr>
@@ -4785,7 +4476,7 @@
       </p:sp>
       <p:sp>
         <p:nvSpPr>
-          <p:cNvPr id="14" name="TextBox 13"/>
+          <p:cNvPr id="11" name="TextBox 10"/>
           <p:cNvSpPr txBox="1"/>
           <p:nvPr/>
         </p:nvSpPr>
@@ -4823,7 +4514,7 @@
       </p:sp>
       <p:sp>
         <p:nvSpPr>
-          <p:cNvPr id="15" name="TextBox 14"/>
+          <p:cNvPr id="12" name="TextBox 11"/>
           <p:cNvSpPr txBox="1"/>
           <p:nvPr/>
         </p:nvSpPr>
@@ -4861,7 +4552,7 @@
       </p:sp>
       <p:sp>
         <p:nvSpPr>
-          <p:cNvPr id="16" name="때 3"/>
+          <p:cNvPr id="13" name="때 3"/>
           <p:cNvSpPr/>
           <p:nvPr/>
         </p:nvSpPr>
@@ -4892,7 +4583,7 @@
       </p:sp>
       <p:sp>
         <p:nvSpPr>
-          <p:cNvPr id="17" name="TextBox 16"/>
+          <p:cNvPr id="14" name="TextBox 13"/>
           <p:cNvSpPr txBox="1"/>
           <p:nvPr/>
         </p:nvSpPr>
@@ -4930,7 +4621,7 @@
       </p:sp>
       <p:sp>
         <p:nvSpPr>
-          <p:cNvPr id="18" name="TextBox 17"/>
+          <p:cNvPr id="15" name="TextBox 14"/>
           <p:cNvSpPr txBox="1"/>
           <p:nvPr/>
         </p:nvSpPr>
@@ -4968,7 +4659,7 @@
       </p:sp>
       <p:sp>
         <p:nvSpPr>
-          <p:cNvPr id="19" name="TextBox 18"/>
+          <p:cNvPr id="16" name="TextBox 15"/>
           <p:cNvSpPr txBox="1"/>
           <p:nvPr/>
         </p:nvSpPr>
@@ -5006,7 +4697,7 @@
       </p:sp>
       <p:sp>
         <p:nvSpPr>
-          <p:cNvPr id="20" name="때 4"/>
+          <p:cNvPr id="17" name="때 4"/>
           <p:cNvSpPr/>
           <p:nvPr/>
         </p:nvSpPr>
@@ -5037,7 +4728,7 @@
       </p:sp>
       <p:sp>
         <p:nvSpPr>
-          <p:cNvPr id="21" name="TextBox 20"/>
+          <p:cNvPr id="18" name="TextBox 17"/>
           <p:cNvSpPr txBox="1"/>
           <p:nvPr/>
         </p:nvSpPr>
@@ -5075,7 +4766,7 @@
       </p:sp>
       <p:sp>
         <p:nvSpPr>
-          <p:cNvPr id="22" name="TextBox 21"/>
+          <p:cNvPr id="19" name="TextBox 18"/>
           <p:cNvSpPr txBox="1"/>
           <p:nvPr/>
         </p:nvSpPr>
@@ -5113,7 +4804,7 @@
       </p:sp>
       <p:sp>
         <p:nvSpPr>
-          <p:cNvPr id="23" name="TextBox 22"/>
+          <p:cNvPr id="20" name="TextBox 19"/>
           <p:cNvSpPr txBox="1"/>
           <p:nvPr/>
         </p:nvSpPr>
@@ -5209,93 +4900,6 @@
       </p:sp>
       <p:sp>
         <p:nvSpPr>
-          <p:cNvPr id="4" name="장식"/>
-          <p:cNvSpPr/>
-          <p:nvPr/>
-        </p:nvSpPr>
-        <p:spPr>
-          <a:xfrm>
-            <a:off x="10655503" y="557784"/>
-            <a:ext cx="877824" cy="219456"/>
-          </a:xfrm>
-          <a:prstGeom prst="wave">
-            <a:avLst/>
-          </a:prstGeom>
-          <a:solidFill>
-            <a:srgbClr val="CEE2F3"/>
-          </a:solidFill>
-          <a:ln>
-            <a:noFill/>
-          </a:ln>
-        </p:spPr>
-        <p:txBody>
-          <a:bodyPr rtlCol="0" anchor="ctr"/>
-          <a:lstStyle/>
-          <a:p>
-            <a:pPr algn="ctr"/>
-          </a:p>
-        </p:txBody>
-      </p:sp>
-      <p:sp>
-        <p:nvSpPr>
-          <p:cNvPr id="5" name="장식"/>
-          <p:cNvSpPr/>
-          <p:nvPr/>
-        </p:nvSpPr>
-        <p:spPr>
-          <a:xfrm>
-            <a:off x="10655503" y="747979"/>
-            <a:ext cx="877824" cy="219456"/>
-          </a:xfrm>
-          <a:prstGeom prst="wave">
-            <a:avLst/>
-          </a:prstGeom>
-          <a:solidFill>
-            <a:srgbClr val="275A86"/>
-          </a:solidFill>
-          <a:ln>
-            <a:noFill/>
-          </a:ln>
-        </p:spPr>
-        <p:txBody>
-          <a:bodyPr rtlCol="0" anchor="ctr"/>
-          <a:lstStyle/>
-          <a:p>
-            <a:pPr algn="ctr"/>
-          </a:p>
-        </p:txBody>
-      </p:sp>
-      <p:sp>
-        <p:nvSpPr>
-          <p:cNvPr id="6" name="장식"/>
-          <p:cNvSpPr/>
-          <p:nvPr/>
-        </p:nvSpPr>
-        <p:spPr>
-          <a:xfrm>
-            <a:off x="10655503" y="938174"/>
-            <a:ext cx="877824" cy="219456"/>
-          </a:xfrm>
-          <a:prstGeom prst="wave">
-            <a:avLst/>
-          </a:prstGeom>
-          <a:solidFill>
-            <a:srgbClr val="913B3E"/>
-          </a:solidFill>
-          <a:ln>
-            <a:noFill/>
-          </a:ln>
-        </p:spPr>
-        <p:txBody>
-          <a:bodyPr rtlCol="0" anchor="ctr"/>
-          <a:lstStyle/>
-          <a:p>
-            <a:pPr algn="ctr"/>
-          </a:p>
-        </p:txBody>
-      </p:sp>
-      <p:sp>
-        <p:nvSpPr>
           <p:cNvPr id="2" name="Title 1"/>
           <p:cNvSpPr>
             <a:spLocks noGrp="1"/>
@@ -5334,7 +4938,7 @@
       </p:sp>
       <p:sp>
         <p:nvSpPr>
-          <p:cNvPr id="7" name="줄 1"/>
+          <p:cNvPr id="4" name="줄 1"/>
           <p:cNvSpPr/>
           <p:nvPr/>
         </p:nvSpPr>
@@ -5367,7 +4971,7 @@
       </p:sp>
       <p:sp>
         <p:nvSpPr>
-          <p:cNvPr id="8" name="번호 1"/>
+          <p:cNvPr id="5" name="번호 1"/>
           <p:cNvSpPr/>
           <p:nvPr/>
         </p:nvSpPr>
@@ -5410,7 +5014,7 @@
       </p:sp>
       <p:sp>
         <p:nvSpPr>
-          <p:cNvPr id="9" name="TextBox 8"/>
+          <p:cNvPr id="6" name="TextBox 5"/>
           <p:cNvSpPr txBox="1"/>
           <p:nvPr/>
         </p:nvSpPr>
@@ -5448,7 +5052,7 @@
       </p:sp>
       <p:sp>
         <p:nvSpPr>
-          <p:cNvPr id="10" name="TextBox 9"/>
+          <p:cNvPr id="7" name="TextBox 6"/>
           <p:cNvSpPr txBox="1"/>
           <p:nvPr/>
         </p:nvSpPr>
@@ -5486,7 +5090,7 @@
       </p:sp>
       <p:sp>
         <p:nvSpPr>
-          <p:cNvPr id="11" name="줄 2"/>
+          <p:cNvPr id="8" name="줄 2"/>
           <p:cNvSpPr/>
           <p:nvPr/>
         </p:nvSpPr>
@@ -5519,7 +5123,7 @@
       </p:sp>
       <p:sp>
         <p:nvSpPr>
-          <p:cNvPr id="12" name="번호 2"/>
+          <p:cNvPr id="9" name="번호 2"/>
           <p:cNvSpPr/>
           <p:nvPr/>
         </p:nvSpPr>
@@ -5562,7 +5166,7 @@
       </p:sp>
       <p:sp>
         <p:nvSpPr>
-          <p:cNvPr id="13" name="TextBox 12"/>
+          <p:cNvPr id="10" name="TextBox 9"/>
           <p:cNvSpPr txBox="1"/>
           <p:nvPr/>
         </p:nvSpPr>
@@ -5600,7 +5204,7 @@
       </p:sp>
       <p:sp>
         <p:nvSpPr>
-          <p:cNvPr id="14" name="TextBox 13"/>
+          <p:cNvPr id="11" name="TextBox 10"/>
           <p:cNvSpPr txBox="1"/>
           <p:nvPr/>
         </p:nvSpPr>
@@ -5638,7 +5242,7 @@
       </p:sp>
       <p:sp>
         <p:nvSpPr>
-          <p:cNvPr id="15" name="줄 3"/>
+          <p:cNvPr id="12" name="줄 3"/>
           <p:cNvSpPr/>
           <p:nvPr/>
         </p:nvSpPr>
@@ -5671,7 +5275,7 @@
       </p:sp>
       <p:sp>
         <p:nvSpPr>
-          <p:cNvPr id="16" name="번호 3"/>
+          <p:cNvPr id="13" name="번호 3"/>
           <p:cNvSpPr/>
           <p:nvPr/>
         </p:nvSpPr>
@@ -5714,7 +5318,7 @@
       </p:sp>
       <p:sp>
         <p:nvSpPr>
-          <p:cNvPr id="17" name="TextBox 16"/>
+          <p:cNvPr id="14" name="TextBox 13"/>
           <p:cNvSpPr txBox="1"/>
           <p:nvPr/>
         </p:nvSpPr>
@@ -5752,7 +5356,7 @@
       </p:sp>
       <p:sp>
         <p:nvSpPr>
-          <p:cNvPr id="18" name="TextBox 17"/>
+          <p:cNvPr id="15" name="TextBox 14"/>
           <p:cNvSpPr txBox="1"/>
           <p:nvPr/>
         </p:nvSpPr>
@@ -5848,93 +5452,6 @@
       </p:sp>
       <p:sp>
         <p:nvSpPr>
-          <p:cNvPr id="4" name="장식"/>
-          <p:cNvSpPr/>
-          <p:nvPr/>
-        </p:nvSpPr>
-        <p:spPr>
-          <a:xfrm>
-            <a:off x="10655503" y="557784"/>
-            <a:ext cx="877824" cy="219456"/>
-          </a:xfrm>
-          <a:prstGeom prst="wave">
-            <a:avLst/>
-          </a:prstGeom>
-          <a:solidFill>
-            <a:srgbClr val="CEE2F3"/>
-          </a:solidFill>
-          <a:ln>
-            <a:noFill/>
-          </a:ln>
-        </p:spPr>
-        <p:txBody>
-          <a:bodyPr rtlCol="0" anchor="ctr"/>
-          <a:lstStyle/>
-          <a:p>
-            <a:pPr algn="ctr"/>
-          </a:p>
-        </p:txBody>
-      </p:sp>
-      <p:sp>
-        <p:nvSpPr>
-          <p:cNvPr id="5" name="장식"/>
-          <p:cNvSpPr/>
-          <p:nvPr/>
-        </p:nvSpPr>
-        <p:spPr>
-          <a:xfrm>
-            <a:off x="10655503" y="747979"/>
-            <a:ext cx="877824" cy="219456"/>
-          </a:xfrm>
-          <a:prstGeom prst="wave">
-            <a:avLst/>
-          </a:prstGeom>
-          <a:solidFill>
-            <a:srgbClr val="275A86"/>
-          </a:solidFill>
-          <a:ln>
-            <a:noFill/>
-          </a:ln>
-        </p:spPr>
-        <p:txBody>
-          <a:bodyPr rtlCol="0" anchor="ctr"/>
-          <a:lstStyle/>
-          <a:p>
-            <a:pPr algn="ctr"/>
-          </a:p>
-        </p:txBody>
-      </p:sp>
-      <p:sp>
-        <p:nvSpPr>
-          <p:cNvPr id="6" name="장식"/>
-          <p:cNvSpPr/>
-          <p:nvPr/>
-        </p:nvSpPr>
-        <p:spPr>
-          <a:xfrm>
-            <a:off x="10655503" y="938174"/>
-            <a:ext cx="877824" cy="219456"/>
-          </a:xfrm>
-          <a:prstGeom prst="wave">
-            <a:avLst/>
-          </a:prstGeom>
-          <a:solidFill>
-            <a:srgbClr val="913B3E"/>
-          </a:solidFill>
-          <a:ln>
-            <a:noFill/>
-          </a:ln>
-        </p:spPr>
-        <p:txBody>
-          <a:bodyPr rtlCol="0" anchor="ctr"/>
-          <a:lstStyle/>
-          <a:p>
-            <a:pPr algn="ctr"/>
-          </a:p>
-        </p:txBody>
-      </p:sp>
-      <p:sp>
-        <p:nvSpPr>
           <p:cNvPr id="2" name="Title 1"/>
           <p:cNvSpPr>
             <a:spLocks noGrp="1"/>
@@ -5973,7 +5490,7 @@
       </p:sp>
       <p:sp>
         <p:nvSpPr>
-          <p:cNvPr id="7" name="사진 자리"/>
+          <p:cNvPr id="4" name="사진 자리"/>
           <p:cNvSpPr/>
           <p:nvPr/>
         </p:nvSpPr>
@@ -6021,7 +5538,7 @@
       </p:sp>
       <p:sp>
         <p:nvSpPr>
-          <p:cNvPr id="8" name="사진 자리"/>
+          <p:cNvPr id="5" name="사진 자리"/>
           <p:cNvSpPr/>
           <p:nvPr/>
         </p:nvSpPr>
@@ -6069,7 +5586,7 @@
       </p:sp>
       <p:sp>
         <p:nvSpPr>
-          <p:cNvPr id="9" name="사진 자리"/>
+          <p:cNvPr id="6" name="사진 자리"/>
           <p:cNvSpPr/>
           <p:nvPr/>
         </p:nvSpPr>
@@ -6117,7 +5634,7 @@
       </p:sp>
       <p:sp>
         <p:nvSpPr>
-          <p:cNvPr id="10" name="사진 자리"/>
+          <p:cNvPr id="7" name="사진 자리"/>
           <p:cNvSpPr/>
           <p:nvPr/>
         </p:nvSpPr>
@@ -6165,7 +5682,7 @@
       </p:sp>
       <p:sp>
         <p:nvSpPr>
-          <p:cNvPr id="11" name="사진 자리"/>
+          <p:cNvPr id="8" name="사진 자리"/>
           <p:cNvSpPr/>
           <p:nvPr/>
         </p:nvSpPr>
@@ -6213,7 +5730,7 @@
       </p:sp>
       <p:sp>
         <p:nvSpPr>
-          <p:cNvPr id="12" name="사진 자리"/>
+          <p:cNvPr id="9" name="사진 자리"/>
           <p:cNvSpPr/>
           <p:nvPr/>
         </p:nvSpPr>
@@ -6270,14 +5787,6 @@
 <file path=ppt/slides/slide6.xml><?xml version="1.0" encoding="utf-8"?>
 <p:sld xmlns:a="http://schemas.openxmlformats.org/drawingml/2006/main" xmlns:p="http://schemas.openxmlformats.org/presentationml/2006/main" xmlns:r="http://schemas.openxmlformats.org/officeDocument/2006/relationships">
   <p:cSld>
-    <p:bg>
-      <p:bgPr>
-        <a:solidFill>
-          <a:srgbClr val="EFF5FA"/>
-        </a:solidFill>
-        <a:effectLst/>
-      </p:bgPr>
-    </p:bg>
     <p:spTree>
       <p:nvGrpSpPr>
         <p:cNvPr id="1" name=""/>
@@ -6285,157 +5794,30 @@
         <p:nvPr/>
       </p:nvGrpSpPr>
       <p:grpSpPr/>
-      <p:sp>
-        <p:nvSpPr>
-          <p:cNvPr id="3" name="장식"/>
-          <p:cNvSpPr/>
+      <p:pic>
+        <p:nvPicPr>
+          <p:cNvPr id="3" name="표지 그림" descr="family-22.jpg"/>
+          <p:cNvPicPr>
+            <a:picLocks noChangeAspect="1"/>
+          </p:cNvPicPr>
           <p:nvPr/>
-        </p:nvSpPr>
-        <p:spPr>
-          <a:xfrm>
-            <a:off x="7315017" y="960120"/>
-            <a:ext cx="3657508" cy="5897880"/>
-          </a:xfrm>
-          <a:prstGeom prst="round2SameRect">
-            <a:avLst>
-              <a:gd name="adj1" fmla="val 50000"/>
-              <a:gd name="adj2" fmla="val 0"/>
-            </a:avLst>
-          </a:prstGeom>
-          <a:solidFill>
-            <a:srgbClr val="CEE2F3"/>
-          </a:solidFill>
-          <a:ln>
-            <a:noFill/>
-          </a:ln>
-        </p:spPr>
-        <p:txBody>
-          <a:bodyPr rtlCol="0" anchor="ctr"/>
-          <a:lstStyle/>
-          <a:p>
-            <a:pPr algn="ctr"/>
-          </a:p>
-        </p:txBody>
-      </p:sp>
-      <p:sp>
-        <p:nvSpPr>
-          <p:cNvPr id="4" name="장식"/>
-          <p:cNvSpPr/>
-          <p:nvPr/>
-        </p:nvSpPr>
-        <p:spPr>
-          <a:xfrm>
-            <a:off x="7924601" y="1783080"/>
-            <a:ext cx="2438339" cy="5074920"/>
-          </a:xfrm>
-          <a:prstGeom prst="round2SameRect">
-            <a:avLst>
-              <a:gd name="adj1" fmla="val 50000"/>
-              <a:gd name="adj2" fmla="val 0"/>
-            </a:avLst>
-          </a:prstGeom>
-          <a:solidFill>
-            <a:srgbClr val="275A86"/>
-          </a:solidFill>
-          <a:ln>
-            <a:noFill/>
-          </a:ln>
-        </p:spPr>
-        <p:txBody>
-          <a:bodyPr rtlCol="0" anchor="ctr"/>
-          <a:lstStyle/>
-          <a:p>
-            <a:pPr algn="ctr"/>
-          </a:p>
-        </p:txBody>
-      </p:sp>
-      <p:sp>
-        <p:nvSpPr>
-          <p:cNvPr id="5" name="장식"/>
-          <p:cNvSpPr/>
-          <p:nvPr/>
-        </p:nvSpPr>
-        <p:spPr>
-          <a:xfrm>
-            <a:off x="8046518" y="3017533"/>
-            <a:ext cx="2194505" cy="548626"/>
-          </a:xfrm>
-          <a:prstGeom prst="wave">
+        </p:nvPicPr>
+        <p:blipFill>
+          <a:blip r:embed="rId2"/>
+          <a:stretch>
+            <a:fillRect/>
+          </a:stretch>
+        </p:blipFill>
+        <p:spPr>
+          <a:xfrm>
+            <a:off x="0" y="0"/>
+            <a:ext cx="12191695" cy="6858000"/>
+          </a:xfrm>
+          <a:prstGeom prst="rect">
             <a:avLst/>
           </a:prstGeom>
-          <a:solidFill>
-            <a:srgbClr val="CEE2F3"/>
-          </a:solidFill>
-          <a:ln>
-            <a:noFill/>
-          </a:ln>
-        </p:spPr>
-        <p:txBody>
-          <a:bodyPr rtlCol="0" anchor="ctr"/>
-          <a:lstStyle/>
-          <a:p>
-            <a:pPr algn="ctr"/>
-          </a:p>
-        </p:txBody>
-      </p:sp>
-      <p:sp>
-        <p:nvSpPr>
-          <p:cNvPr id="6" name="장식"/>
-          <p:cNvSpPr/>
-          <p:nvPr/>
-        </p:nvSpPr>
-        <p:spPr>
-          <a:xfrm>
-            <a:off x="8046518" y="3493009"/>
-            <a:ext cx="2194505" cy="548626"/>
-          </a:xfrm>
-          <a:prstGeom prst="wave">
-            <a:avLst/>
-          </a:prstGeom>
-          <a:solidFill>
-            <a:srgbClr val="FFFFFF"/>
-          </a:solidFill>
-          <a:ln>
-            <a:noFill/>
-          </a:ln>
-        </p:spPr>
-        <p:txBody>
-          <a:bodyPr rtlCol="0" anchor="ctr"/>
-          <a:lstStyle/>
-          <a:p>
-            <a:pPr algn="ctr"/>
-          </a:p>
-        </p:txBody>
-      </p:sp>
-      <p:sp>
-        <p:nvSpPr>
-          <p:cNvPr id="7" name="장식"/>
-          <p:cNvSpPr/>
-          <p:nvPr/>
-        </p:nvSpPr>
-        <p:spPr>
-          <a:xfrm>
-            <a:off x="8046518" y="3968485"/>
-            <a:ext cx="2194505" cy="548626"/>
-          </a:xfrm>
-          <a:prstGeom prst="wave">
-            <a:avLst/>
-          </a:prstGeom>
-          <a:solidFill>
-            <a:srgbClr val="913B3E"/>
-          </a:solidFill>
-          <a:ln>
-            <a:noFill/>
-          </a:ln>
-        </p:spPr>
-        <p:txBody>
-          <a:bodyPr rtlCol="0" anchor="ctr"/>
-          <a:lstStyle/>
-          <a:p>
-            <a:pPr algn="ctr"/>
-          </a:p>
-        </p:txBody>
-      </p:sp>
+        </p:spPr>
+      </p:pic>
       <p:sp>
         <p:nvSpPr>
           <p:cNvPr id="2" name="Title 1"/>
@@ -6469,21 +5851,21 @@
                   <a:srgbClr val="122A3F"/>
                 </a:solidFill>
               </a:rPr>
-              <a:t>우리 가족을 소개했어요</a:t>
-            </a:r>
-          </a:p>
-        </p:txBody>
-      </p:sp>
-      <p:sp>
-        <p:nvSpPr>
-          <p:cNvPr id="8" name="한 줄 문구"/>
+              <a:t>우리 가족 소개를 마칩니다</a:t>
+            </a:r>
+          </a:p>
+        </p:txBody>
+      </p:sp>
+      <p:sp>
+        <p:nvSpPr>
+          <p:cNvPr id="4" name="한 줄 문구"/>
           <p:cNvSpPr txBox="1"/>
           <p:nvPr/>
         </p:nvSpPr>
         <p:spPr>
           <a:xfrm>
-            <a:off x="853418" y="3703320"/>
-            <a:ext cx="5852013" cy="822960"/>
+            <a:off x="853418" y="3749039"/>
+            <a:ext cx="6095847" cy="822960"/>
           </a:xfrm>
           <a:prstGeom prst="rect">
             <a:avLst/>
@@ -6507,21 +5889,21 @@
                   <a:srgbClr val="122A3F"/>
                 </a:solidFill>
               </a:rPr>
-              <a:t>함께여서 늘 든든합니다</a:t>
-            </a:r>
-          </a:p>
-        </p:txBody>
-      </p:sp>
-      <p:sp>
-        <p:nvSpPr>
-          <p:cNvPr id="9" name="안내 문구"/>
+              <a:t>읽어 주셔서 고맙습니다</a:t>
+            </a:r>
+          </a:p>
+        </p:txBody>
+      </p:sp>
+      <p:sp>
+        <p:nvSpPr>
+          <p:cNvPr id="5" name="안내 문구"/>
           <p:cNvSpPr txBox="1"/>
           <p:nvPr/>
         </p:nvSpPr>
         <p:spPr>
           <a:xfrm>
-            <a:off x="853418" y="4572000"/>
-            <a:ext cx="5852013" cy="914400"/>
+            <a:off x="853418" y="4617720"/>
+            <a:ext cx="6095847" cy="914400"/>
           </a:xfrm>
           <a:prstGeom prst="rect">
             <a:avLst/>

--- a/public/fun/pack/pptx/family/가족소개_22_아이와함께_섬마을선착장.pptx
+++ b/public/fun/pack/pptx/family/가족소개_22_아이와함께_섬마을선착장.pptx
@@ -3347,7 +3347,7 @@
             <a:r>
               <a:rPr sz="3600" b="1" i="0">
                 <a:solidFill>
-                  <a:srgbClr val="122A3F"/>
+                  <a:srgbClr val="113B5F"/>
                 </a:solidFill>
               </a:rPr>
               <a:t>우리 가족을 소개합니다</a:t>
@@ -3385,7 +3385,7 @@
             <a:r>
               <a:rPr sz="1700" b="0" i="1">
                 <a:solidFill>
-                  <a:srgbClr val="122A3F"/>
+                  <a:srgbClr val="113B5F"/>
                 </a:solidFill>
               </a:rPr>
               <a:t>섬 가는 배를 기다리던 선착장</a:t>
@@ -3445,7 +3445,7 @@
     <p:bg>
       <p:bgPr>
         <a:solidFill>
-          <a:srgbClr val="EFF5FA"/>
+          <a:srgbClr val="EEF5FC"/>
         </a:solidFill>
         <a:effectLst/>
       </p:bgPr>
@@ -3475,7 +3475,7 @@
             </a:avLst>
           </a:prstGeom>
           <a:solidFill>
-            <a:srgbClr val="CEE2F3"/>
+            <a:srgbClr val="D1E7FA"/>
           </a:solidFill>
           <a:ln>
             <a:noFill/>
@@ -3519,7 +3519,7 @@
             <a:r>
               <a:rPr sz="3000" b="1" i="0">
                 <a:solidFill>
-                  <a:srgbClr val="122A3F"/>
+                  <a:srgbClr val="113B5F"/>
                 </a:solidFill>
               </a:rPr>
               <a:t>가족 구성원</a:t>
@@ -3542,11 +3542,11 @@
             <a:avLst/>
           </a:prstGeom>
           <a:solidFill>
-            <a:srgbClr val="CEE2F3"/>
+            <a:srgbClr val="D1E7FA"/>
           </a:solidFill>
           <a:ln w="19050">
             <a:solidFill>
-              <a:srgbClr val="275A86"/>
+              <a:srgbClr val="267BC5"/>
             </a:solidFill>
             <a:prstDash val="dash"/>
           </a:ln>
@@ -3565,7 +3565,7 @@
             <a:r>
               <a:rPr sz="1200" b="0" i="0">
                 <a:solidFill>
-                  <a:srgbClr val="122A3F"/>
+                  <a:srgbClr val="113B5F"/>
                 </a:solidFill>
               </a:rPr>
               <a:t>사진</a:t>
@@ -3603,7 +3603,7 @@
             <a:r>
               <a:rPr sz="1600" b="1" i="0">
                 <a:solidFill>
-                  <a:srgbClr val="122A3F"/>
+                  <a:srgbClr val="113B5F"/>
                 </a:solidFill>
               </a:rPr>
               <a:t>아빠</a:t>
@@ -3694,11 +3694,11 @@
             <a:avLst/>
           </a:prstGeom>
           <a:solidFill>
-            <a:srgbClr val="CEE2F3"/>
+            <a:srgbClr val="D1E7FA"/>
           </a:solidFill>
           <a:ln w="19050">
             <a:solidFill>
-              <a:srgbClr val="275A86"/>
+              <a:srgbClr val="267BC5"/>
             </a:solidFill>
             <a:prstDash val="dash"/>
           </a:ln>
@@ -3717,7 +3717,7 @@
             <a:r>
               <a:rPr sz="1200" b="0" i="0">
                 <a:solidFill>
-                  <a:srgbClr val="122A3F"/>
+                  <a:srgbClr val="113B5F"/>
                 </a:solidFill>
               </a:rPr>
               <a:t>사진</a:t>
@@ -3755,7 +3755,7 @@
             <a:r>
               <a:rPr sz="1600" b="1" i="0">
                 <a:solidFill>
-                  <a:srgbClr val="122A3F"/>
+                  <a:srgbClr val="113B5F"/>
                 </a:solidFill>
               </a:rPr>
               <a:t>엄마</a:t>
@@ -3846,11 +3846,11 @@
             <a:avLst/>
           </a:prstGeom>
           <a:solidFill>
-            <a:srgbClr val="CEE2F3"/>
+            <a:srgbClr val="D1E7FA"/>
           </a:solidFill>
           <a:ln w="19050">
             <a:solidFill>
-              <a:srgbClr val="275A86"/>
+              <a:srgbClr val="267BC5"/>
             </a:solidFill>
             <a:prstDash val="dash"/>
           </a:ln>
@@ -3869,7 +3869,7 @@
             <a:r>
               <a:rPr sz="1200" b="0" i="0">
                 <a:solidFill>
-                  <a:srgbClr val="122A3F"/>
+                  <a:srgbClr val="113B5F"/>
                 </a:solidFill>
               </a:rPr>
               <a:t>사진</a:t>
@@ -3907,7 +3907,7 @@
             <a:r>
               <a:rPr sz="1600" b="1" i="0">
                 <a:solidFill>
-                  <a:srgbClr val="122A3F"/>
+                  <a:srgbClr val="113B5F"/>
                 </a:solidFill>
               </a:rPr>
               <a:t>첫째</a:t>
@@ -3998,11 +3998,11 @@
             <a:avLst/>
           </a:prstGeom>
           <a:solidFill>
-            <a:srgbClr val="CEE2F3"/>
+            <a:srgbClr val="D1E7FA"/>
           </a:solidFill>
           <a:ln w="19050">
             <a:solidFill>
-              <a:srgbClr val="275A86"/>
+              <a:srgbClr val="267BC5"/>
             </a:solidFill>
             <a:prstDash val="dash"/>
           </a:ln>
@@ -4021,7 +4021,7 @@
             <a:r>
               <a:rPr sz="1200" b="0" i="0">
                 <a:solidFill>
-                  <a:srgbClr val="122A3F"/>
+                  <a:srgbClr val="113B5F"/>
                 </a:solidFill>
               </a:rPr>
               <a:t>사진</a:t>
@@ -4059,7 +4059,7 @@
             <a:r>
               <a:rPr sz="1600" b="1" i="0">
                 <a:solidFill>
-                  <a:srgbClr val="122A3F"/>
+                  <a:srgbClr val="113B5F"/>
                 </a:solidFill>
               </a:rPr>
               <a:t>둘째</a:t>
@@ -4149,7 +4149,7 @@
     <p:bg>
       <p:bgPr>
         <a:solidFill>
-          <a:srgbClr val="EFF5FA"/>
+          <a:srgbClr val="EEF5FC"/>
         </a:solidFill>
         <a:effectLst/>
       </p:bgPr>
@@ -4179,7 +4179,7 @@
             </a:avLst>
           </a:prstGeom>
           <a:solidFill>
-            <a:srgbClr val="CEE2F3"/>
+            <a:srgbClr val="D1E7FA"/>
           </a:solidFill>
           <a:ln>
             <a:noFill/>
@@ -4223,7 +4223,7 @@
             <a:r>
               <a:rPr sz="3000" b="1" i="0">
                 <a:solidFill>
-                  <a:srgbClr val="122A3F"/>
+                  <a:srgbClr val="113B5F"/>
                 </a:solidFill>
               </a:rPr>
               <a:t>우리 가족 이야기</a:t>
@@ -4246,7 +4246,7 @@
             <a:avLst/>
           </a:prstGeom>
           <a:solidFill>
-            <a:srgbClr val="CEE2F3"/>
+            <a:srgbClr val="D1E7FA"/>
           </a:solidFill>
           <a:ln>
             <a:noFill/>
@@ -4275,7 +4275,7 @@
             <a:avLst/>
           </a:prstGeom>
           <a:solidFill>
-            <a:srgbClr val="275A86"/>
+            <a:srgbClr val="267BC5"/>
           </a:solidFill>
           <a:ln w="38100">
             <a:solidFill>
@@ -4321,7 +4321,7 @@
             <a:r>
               <a:rPr sz="1600" b="1" i="0">
                 <a:solidFill>
-                  <a:srgbClr val="275A86"/>
+                  <a:srgbClr val="267BC5"/>
                 </a:solidFill>
               </a:rPr>
               <a:t>가족이 된 날</a:t>
@@ -4359,7 +4359,7 @@
             <a:r>
               <a:rPr sz="1800" b="1" i="0">
                 <a:solidFill>
-                  <a:srgbClr val="122A3F"/>
+                  <a:srgbClr val="113B5F"/>
                 </a:solidFill>
               </a:rPr>
               <a:t>우리의 시작</a:t>
@@ -4420,7 +4420,7 @@
             <a:avLst/>
           </a:prstGeom>
           <a:solidFill>
-            <a:srgbClr val="275A86"/>
+            <a:srgbClr val="267BC5"/>
           </a:solidFill>
           <a:ln w="38100">
             <a:solidFill>
@@ -4466,7 +4466,7 @@
             <a:r>
               <a:rPr sz="1600" b="1" i="0">
                 <a:solidFill>
-                  <a:srgbClr val="275A86"/>
+                  <a:srgbClr val="267BC5"/>
                 </a:solidFill>
               </a:rPr>
               <a:t>아이가 태어난 날</a:t>
@@ -4504,7 +4504,7 @@
             <a:r>
               <a:rPr sz="1800" b="1" i="0">
                 <a:solidFill>
-                  <a:srgbClr val="122A3F"/>
+                  <a:srgbClr val="113B5F"/>
                 </a:solidFill>
               </a:rPr>
               <a:t>새 식구</a:t>
@@ -4565,7 +4565,7 @@
             <a:avLst/>
           </a:prstGeom>
           <a:solidFill>
-            <a:srgbClr val="275A86"/>
+            <a:srgbClr val="267BC5"/>
           </a:solidFill>
           <a:ln w="38100">
             <a:solidFill>
@@ -4611,7 +4611,7 @@
             <a:r>
               <a:rPr sz="1600" b="1" i="0">
                 <a:solidFill>
-                  <a:srgbClr val="275A86"/>
+                  <a:srgbClr val="267BC5"/>
                 </a:solidFill>
               </a:rPr>
               <a:t>첫 가족 여행</a:t>
@@ -4649,7 +4649,7 @@
             <a:r>
               <a:rPr sz="1800" b="1" i="0">
                 <a:solidFill>
-                  <a:srgbClr val="122A3F"/>
+                  <a:srgbClr val="113B5F"/>
                 </a:solidFill>
               </a:rPr>
               <a:t>함께 떠난 길</a:t>
@@ -4710,7 +4710,7 @@
             <a:avLst/>
           </a:prstGeom>
           <a:solidFill>
-            <a:srgbClr val="275A86"/>
+            <a:srgbClr val="267BC5"/>
           </a:solidFill>
           <a:ln w="38100">
             <a:solidFill>
@@ -4756,7 +4756,7 @@
             <a:r>
               <a:rPr sz="1600" b="1" i="0">
                 <a:solidFill>
-                  <a:srgbClr val="275A86"/>
+                  <a:srgbClr val="267BC5"/>
                 </a:solidFill>
               </a:rPr>
               <a:t>지금</a:t>
@@ -4794,7 +4794,7 @@
             <a:r>
               <a:rPr sz="1800" b="1" i="0">
                 <a:solidFill>
-                  <a:srgbClr val="122A3F"/>
+                  <a:srgbClr val="113B5F"/>
                 </a:solidFill>
               </a:rPr>
               <a:t>오늘의 우리</a:t>
@@ -4854,7 +4854,7 @@
     <p:bg>
       <p:bgPr>
         <a:solidFill>
-          <a:srgbClr val="EFF5FA"/>
+          <a:srgbClr val="EEF5FC"/>
         </a:solidFill>
         <a:effectLst/>
       </p:bgPr>
@@ -4884,7 +4884,7 @@
             </a:avLst>
           </a:prstGeom>
           <a:solidFill>
-            <a:srgbClr val="CEE2F3"/>
+            <a:srgbClr val="D1E7FA"/>
           </a:solidFill>
           <a:ln>
             <a:noFill/>
@@ -4928,7 +4928,7 @@
             <a:r>
               <a:rPr sz="3000" b="1" i="0">
                 <a:solidFill>
-                  <a:srgbClr val="122A3F"/>
+                  <a:srgbClr val="113B5F"/>
                 </a:solidFill>
               </a:rPr>
               <a:t>우리 가족의 약속</a:t>
@@ -4953,11 +4953,11 @@
             </a:avLst>
           </a:prstGeom>
           <a:solidFill>
-            <a:srgbClr val="EFF5FA"/>
+            <a:srgbClr val="EEF5FC"/>
           </a:solidFill>
           <a:ln w="12700">
             <a:solidFill>
-              <a:srgbClr val="CEE2F3"/>
+              <a:srgbClr val="D1E7FA"/>
             </a:solidFill>
           </a:ln>
         </p:spPr>
@@ -4984,7 +4984,7 @@
             <a:avLst/>
           </a:prstGeom>
           <a:solidFill>
-            <a:srgbClr val="275A86"/>
+            <a:srgbClr val="267BC5"/>
           </a:solidFill>
           <a:ln>
             <a:noFill/>
@@ -5042,7 +5042,7 @@
             <a:r>
               <a:rPr sz="1800" b="1" i="0">
                 <a:solidFill>
-                  <a:srgbClr val="122A3F"/>
+                  <a:srgbClr val="113B5F"/>
                 </a:solidFill>
               </a:rPr>
               <a:t>약속 1</a:t>
@@ -5105,11 +5105,11 @@
             </a:avLst>
           </a:prstGeom>
           <a:solidFill>
-            <a:srgbClr val="EFF5FA"/>
+            <a:srgbClr val="EEF5FC"/>
           </a:solidFill>
           <a:ln w="12700">
             <a:solidFill>
-              <a:srgbClr val="CEE2F3"/>
+              <a:srgbClr val="D1E7FA"/>
             </a:solidFill>
           </a:ln>
         </p:spPr>
@@ -5136,7 +5136,7 @@
             <a:avLst/>
           </a:prstGeom>
           <a:solidFill>
-            <a:srgbClr val="275A86"/>
+            <a:srgbClr val="267BC5"/>
           </a:solidFill>
           <a:ln>
             <a:noFill/>
@@ -5194,7 +5194,7 @@
             <a:r>
               <a:rPr sz="1800" b="1" i="0">
                 <a:solidFill>
-                  <a:srgbClr val="122A3F"/>
+                  <a:srgbClr val="113B5F"/>
                 </a:solidFill>
               </a:rPr>
               <a:t>약속 2</a:t>
@@ -5257,11 +5257,11 @@
             </a:avLst>
           </a:prstGeom>
           <a:solidFill>
-            <a:srgbClr val="EFF5FA"/>
+            <a:srgbClr val="EEF5FC"/>
           </a:solidFill>
           <a:ln w="12700">
             <a:solidFill>
-              <a:srgbClr val="CEE2F3"/>
+              <a:srgbClr val="D1E7FA"/>
             </a:solidFill>
           </a:ln>
         </p:spPr>
@@ -5288,7 +5288,7 @@
             <a:avLst/>
           </a:prstGeom>
           <a:solidFill>
-            <a:srgbClr val="275A86"/>
+            <a:srgbClr val="267BC5"/>
           </a:solidFill>
           <a:ln>
             <a:noFill/>
@@ -5346,7 +5346,7 @@
             <a:r>
               <a:rPr sz="1800" b="1" i="0">
                 <a:solidFill>
-                  <a:srgbClr val="122A3F"/>
+                  <a:srgbClr val="113B5F"/>
                 </a:solidFill>
               </a:rPr>
               <a:t>약속 3</a:t>
@@ -5406,7 +5406,7 @@
     <p:bg>
       <p:bgPr>
         <a:solidFill>
-          <a:srgbClr val="EFF5FA"/>
+          <a:srgbClr val="EEF5FC"/>
         </a:solidFill>
         <a:effectLst/>
       </p:bgPr>
@@ -5436,7 +5436,7 @@
             </a:avLst>
           </a:prstGeom>
           <a:solidFill>
-            <a:srgbClr val="CEE2F3"/>
+            <a:srgbClr val="D1E7FA"/>
           </a:solidFill>
           <a:ln>
             <a:noFill/>
@@ -5480,7 +5480,7 @@
             <a:r>
               <a:rPr sz="3000" b="1" i="0">
                 <a:solidFill>
-                  <a:srgbClr val="122A3F"/>
+                  <a:srgbClr val="113B5F"/>
                 </a:solidFill>
               </a:rPr>
               <a:t>가족 사진</a:t>
@@ -5505,11 +5505,11 @@
             </a:avLst>
           </a:prstGeom>
           <a:solidFill>
-            <a:srgbClr val="CEE2F3"/>
+            <a:srgbClr val="D1E7FA"/>
           </a:solidFill>
           <a:ln w="19050">
             <a:solidFill>
-              <a:srgbClr val="275A86"/>
+              <a:srgbClr val="267BC5"/>
             </a:solidFill>
             <a:prstDash val="dash"/>
           </a:ln>
@@ -5528,7 +5528,7 @@
             <a:r>
               <a:rPr sz="1200" b="0" i="0">
                 <a:solidFill>
-                  <a:srgbClr val="122A3F"/>
+                  <a:srgbClr val="113B5F"/>
                 </a:solidFill>
               </a:rPr>
               <a:t>사진 1</a:t>
@@ -5553,11 +5553,11 @@
             </a:avLst>
           </a:prstGeom>
           <a:solidFill>
-            <a:srgbClr val="CEE2F3"/>
+            <a:srgbClr val="D1E7FA"/>
           </a:solidFill>
           <a:ln w="19050">
             <a:solidFill>
-              <a:srgbClr val="275A86"/>
+              <a:srgbClr val="267BC5"/>
             </a:solidFill>
             <a:prstDash val="dash"/>
           </a:ln>
@@ -5576,7 +5576,7 @@
             <a:r>
               <a:rPr sz="1200" b="0" i="0">
                 <a:solidFill>
-                  <a:srgbClr val="122A3F"/>
+                  <a:srgbClr val="113B5F"/>
                 </a:solidFill>
               </a:rPr>
               <a:t>사진 2</a:t>
@@ -5601,11 +5601,11 @@
             </a:avLst>
           </a:prstGeom>
           <a:solidFill>
-            <a:srgbClr val="CEE2F3"/>
+            <a:srgbClr val="D1E7FA"/>
           </a:solidFill>
           <a:ln w="19050">
             <a:solidFill>
-              <a:srgbClr val="275A86"/>
+              <a:srgbClr val="267BC5"/>
             </a:solidFill>
             <a:prstDash val="dash"/>
           </a:ln>
@@ -5624,7 +5624,7 @@
             <a:r>
               <a:rPr sz="1200" b="0" i="0">
                 <a:solidFill>
-                  <a:srgbClr val="122A3F"/>
+                  <a:srgbClr val="113B5F"/>
                 </a:solidFill>
               </a:rPr>
               <a:t>사진 3</a:t>
@@ -5649,11 +5649,11 @@
             </a:avLst>
           </a:prstGeom>
           <a:solidFill>
-            <a:srgbClr val="CEE2F3"/>
+            <a:srgbClr val="D1E7FA"/>
           </a:solidFill>
           <a:ln w="19050">
             <a:solidFill>
-              <a:srgbClr val="275A86"/>
+              <a:srgbClr val="267BC5"/>
             </a:solidFill>
             <a:prstDash val="dash"/>
           </a:ln>
@@ -5672,7 +5672,7 @@
             <a:r>
               <a:rPr sz="1200" b="0" i="0">
                 <a:solidFill>
-                  <a:srgbClr val="122A3F"/>
+                  <a:srgbClr val="113B5F"/>
                 </a:solidFill>
               </a:rPr>
               <a:t>사진 4</a:t>
@@ -5697,11 +5697,11 @@
             </a:avLst>
           </a:prstGeom>
           <a:solidFill>
-            <a:srgbClr val="CEE2F3"/>
+            <a:srgbClr val="D1E7FA"/>
           </a:solidFill>
           <a:ln w="19050">
             <a:solidFill>
-              <a:srgbClr val="275A86"/>
+              <a:srgbClr val="267BC5"/>
             </a:solidFill>
             <a:prstDash val="dash"/>
           </a:ln>
@@ -5720,7 +5720,7 @@
             <a:r>
               <a:rPr sz="1200" b="0" i="0">
                 <a:solidFill>
-                  <a:srgbClr val="122A3F"/>
+                  <a:srgbClr val="113B5F"/>
                 </a:solidFill>
               </a:rPr>
               <a:t>사진 5</a:t>
@@ -5745,11 +5745,11 @@
             </a:avLst>
           </a:prstGeom>
           <a:solidFill>
-            <a:srgbClr val="CEE2F3"/>
+            <a:srgbClr val="D1E7FA"/>
           </a:solidFill>
           <a:ln w="19050">
             <a:solidFill>
-              <a:srgbClr val="275A86"/>
+              <a:srgbClr val="267BC5"/>
             </a:solidFill>
             <a:prstDash val="dash"/>
           </a:ln>
@@ -5768,7 +5768,7 @@
             <a:r>
               <a:rPr sz="1200" b="0" i="0">
                 <a:solidFill>
-                  <a:srgbClr val="122A3F"/>
+                  <a:srgbClr val="113B5F"/>
                 </a:solidFill>
               </a:rPr>
               <a:t>사진 6</a:t>
@@ -5848,7 +5848,7 @@
             <a:r>
               <a:rPr sz="3600" b="1" i="0">
                 <a:solidFill>
-                  <a:srgbClr val="122A3F"/>
+                  <a:srgbClr val="113B5F"/>
                 </a:solidFill>
               </a:rPr>
               <a:t>우리 가족 소개를 마칩니다</a:t>
@@ -5886,7 +5886,7 @@
             <a:r>
               <a:rPr sz="1700" b="0" i="1">
                 <a:solidFill>
-                  <a:srgbClr val="122A3F"/>
+                  <a:srgbClr val="113B5F"/>
                 </a:solidFill>
               </a:rPr>
               <a:t>읽어 주셔서 고맙습니다</a:t>
@@ -5951,34 +5951,34 @@
         <a:sysClr val="window" lastClr="FFFFFF"/>
       </a:lt1>
       <a:dk2>
-        <a:srgbClr val="122A3F"/>
+        <a:srgbClr val="113B5F"/>
       </a:dk2>
       <a:lt2>
-        <a:srgbClr val="EFF5FA"/>
+        <a:srgbClr val="EEF5FC"/>
       </a:lt2>
       <a:accent1>
-        <a:srgbClr val="275A86"/>
+        <a:srgbClr val="267BC5"/>
       </a:accent1>
       <a:accent2>
-        <a:srgbClr val="913B3E"/>
+        <a:srgbClr val="209DB6"/>
       </a:accent2>
       <a:accent3>
-        <a:srgbClr val="122A3F"/>
+        <a:srgbClr val="113B5F"/>
       </a:accent3>
       <a:accent4>
-        <a:srgbClr val="CEE2F3"/>
+        <a:srgbClr val="D1E7FA"/>
       </a:accent4>
       <a:accent5>
-        <a:srgbClr val="5C4A62"/>
+        <a:srgbClr val="238CBE"/>
       </a:accent5>
       <a:accent6>
-        <a:srgbClr val="717F8C"/>
+        <a:srgbClr val="70899F"/>
       </a:accent6>
       <a:hlink>
-        <a:srgbClr val="275A86"/>
+        <a:srgbClr val="267BC5"/>
       </a:hlink>
       <a:folHlink>
-        <a:srgbClr val="122A3F"/>
+        <a:srgbClr val="113B5F"/>
       </a:folHlink>
     </a:clrScheme>
     <a:fontScheme name="Office">

--- a/public/fun/pack/pptx/family/가족소개_22_아이와함께_섬마을선착장.pptx
+++ b/public/fun/pack/pptx/family/가족소개_22_아이와함께_섬마을선착장.pptx
@@ -3286,6 +3286,14 @@
 <file path=ppt/slides/slide1.xml><?xml version="1.0" encoding="utf-8"?>
 <p:sld xmlns:a="http://schemas.openxmlformats.org/drawingml/2006/main" xmlns:p="http://schemas.openxmlformats.org/presentationml/2006/main" xmlns:r="http://schemas.openxmlformats.org/officeDocument/2006/relationships">
   <p:cSld>
+    <p:bg>
+      <p:bgPr>
+        <a:solidFill>
+          <a:srgbClr val="EAF4FD"/>
+        </a:solidFill>
+        <a:effectLst/>
+      </p:bgPr>
+    </p:bg>
     <p:spTree>
       <p:nvGrpSpPr>
         <p:cNvPr id="1" name=""/>
@@ -3293,30 +3301,119 @@
         <p:nvPr/>
       </p:nvGrpSpPr>
       <p:grpSpPr/>
-      <p:pic>
-        <p:nvPicPr>
-          <p:cNvPr id="3" name="표지 그림" descr="family-22.jpg"/>
-          <p:cNvPicPr>
-            <a:picLocks noChangeAspect="1"/>
-          </p:cNvPicPr>
-          <p:nvPr/>
-        </p:nvPicPr>
-        <p:blipFill>
-          <a:blip r:embed="rId2"/>
-          <a:stretch>
-            <a:fillRect/>
-          </a:stretch>
-        </p:blipFill>
-        <p:spPr>
-          <a:xfrm>
-            <a:off x="0" y="0"/>
-            <a:ext cx="12191695" cy="6858000"/>
+      <p:sp>
+        <p:nvSpPr>
+          <p:cNvPr id="3" name="사진 자리"/>
+          <p:cNvSpPr/>
+          <p:nvPr/>
+        </p:nvSpPr>
+        <p:spPr>
+          <a:xfrm>
+            <a:off x="1463003" y="685800"/>
+            <a:ext cx="3169840" cy="5486400"/>
+          </a:xfrm>
+          <a:prstGeom prst="round2SameRect">
+            <a:avLst>
+              <a:gd name="adj1" fmla="val 50000"/>
+              <a:gd name="adj2" fmla="val 0"/>
+            </a:avLst>
+          </a:prstGeom>
+          <a:solidFill>
+            <a:srgbClr val="A5CFF3"/>
+          </a:solidFill>
+          <a:ln>
+            <a:noFill/>
+          </a:ln>
+        </p:spPr>
+        <p:txBody>
+          <a:bodyPr rtlCol="0" anchor="ctr" wrap="square" lIns="54864" rIns="54864" tIns="27432" bIns="27432">
+            <a:noAutofit/>
+          </a:bodyPr>
+          <a:lstStyle/>
+          <a:p>
+            <a:pPr algn="ctr">
+              <a:lnSpc>
+                <a:spcPct val="100000"/>
+              </a:lnSpc>
+            </a:pPr>
+            <a:r>
+              <a:rPr sz="1400" b="0" i="0">
+                <a:solidFill>
+                  <a:srgbClr val="273949"/>
+                </a:solidFill>
+              </a:rPr>
+              <a:t>사진을 넣어 주세요</a:t>
+            </a:r>
+          </a:p>
+        </p:txBody>
+      </p:sp>
+      <p:sp>
+        <p:nvSpPr>
+          <p:cNvPr id="4" name="장식"/>
+          <p:cNvSpPr/>
+          <p:nvPr/>
+        </p:nvSpPr>
+        <p:spPr>
+          <a:xfrm>
+            <a:off x="4358505" y="4251960"/>
+            <a:ext cx="1005840" cy="1005840"/>
+          </a:xfrm>
+          <a:prstGeom prst="ellipse">
+            <a:avLst/>
+          </a:prstGeom>
+          <a:solidFill>
+            <a:srgbClr val="A5CFF3"/>
+          </a:solidFill>
+          <a:ln>
+            <a:noFill/>
+          </a:ln>
+        </p:spPr>
+        <p:txBody>
+          <a:bodyPr rtlCol="0" anchor="ctr"/>
+          <a:lstStyle/>
+          <a:p>
+            <a:pPr algn="ctr"/>
+          </a:p>
+        </p:txBody>
+      </p:sp>
+      <p:sp>
+        <p:nvSpPr>
+          <p:cNvPr id="5" name="라벨"/>
+          <p:cNvSpPr txBox="1"/>
+          <p:nvPr/>
+        </p:nvSpPr>
+        <p:spPr>
+          <a:xfrm>
+            <a:off x="6827349" y="2148840"/>
+            <a:ext cx="4632844" cy="274320"/>
           </a:xfrm>
           <a:prstGeom prst="rect">
             <a:avLst/>
           </a:prstGeom>
-        </p:spPr>
-      </p:pic>
+          <a:noFill/>
+        </p:spPr>
+        <p:txBody>
+          <a:bodyPr wrap="square" lIns="54864" rIns="54864" tIns="27432" bIns="27432" anchor="t">
+            <a:noAutofit/>
+          </a:bodyPr>
+          <a:lstStyle/>
+          <a:p>
+            <a:pPr algn="l">
+              <a:lnSpc>
+                <a:spcPct val="115000"/>
+              </a:lnSpc>
+            </a:pPr>
+            <a:r>
+              <a:rPr sz="1000" b="1" i="0" spc="250">
+                <a:solidFill>
+                  <a:srgbClr val="26231F"/>
+                </a:solidFill>
+              </a:rPr>
+              <a:t>FAMILY ALBUM</a:t>
+            </a:r>
+          </a:p>
+        </p:txBody>
+      </p:sp>
       <p:sp>
         <p:nvSpPr>
           <p:cNvPr id="2" name="Title 1"/>
@@ -3329,8 +3426,8 @@
         </p:nvSpPr>
         <p:spPr>
           <a:xfrm>
-            <a:off x="853418" y="2057400"/>
-            <a:ext cx="6095847" cy="1554480"/>
+            <a:off x="6827349" y="2606040"/>
+            <a:ext cx="4632844" cy="1188720"/>
           </a:xfrm>
         </p:spPr>
         <p:txBody>
@@ -3345,9 +3442,9 @@
               </a:lnSpc>
             </a:pPr>
             <a:r>
-              <a:rPr sz="3600" b="1" i="0">
-                <a:solidFill>
-                  <a:srgbClr val="113B5F"/>
+              <a:rPr sz="4000" b="1" i="0">
+                <a:solidFill>
+                  <a:srgbClr val="26231F"/>
                 </a:solidFill>
               </a:rPr>
               <a:t>우리 가족을 소개합니다</a:t>
@@ -3357,14 +3454,14 @@
       </p:sp>
       <p:sp>
         <p:nvSpPr>
-          <p:cNvPr id="4" name="한 줄 문구"/>
+          <p:cNvPr id="6" name="한 줄 문구"/>
           <p:cNvSpPr txBox="1"/>
           <p:nvPr/>
         </p:nvSpPr>
         <p:spPr>
           <a:xfrm>
-            <a:off x="853418" y="3749039"/>
-            <a:ext cx="6095847" cy="822960"/>
+            <a:off x="6827349" y="3886200"/>
+            <a:ext cx="4632844" cy="822960"/>
           </a:xfrm>
           <a:prstGeom prst="rect">
             <a:avLst/>
@@ -3383,9 +3480,9 @@
               </a:lnSpc>
             </a:pPr>
             <a:r>
-              <a:rPr sz="1700" b="0" i="1">
-                <a:solidFill>
-                  <a:srgbClr val="113B5F"/>
+              <a:rPr sz="1700" b="0" i="0">
+                <a:solidFill>
+                  <a:srgbClr val="26231F"/>
                 </a:solidFill>
               </a:rPr>
               <a:t>섬 가는 배를 기다리던 선착장</a:t>
@@ -3395,14 +3492,14 @@
       </p:sp>
       <p:sp>
         <p:nvSpPr>
-          <p:cNvPr id="5" name="안내 문구"/>
+          <p:cNvPr id="7" name="안내 문구"/>
           <p:cNvSpPr txBox="1"/>
           <p:nvPr/>
         </p:nvSpPr>
         <p:spPr>
           <a:xfrm>
-            <a:off x="853418" y="4617720"/>
-            <a:ext cx="6095847" cy="914400"/>
+            <a:off x="6827349" y="4754880"/>
+            <a:ext cx="4632844" cy="914400"/>
           </a:xfrm>
           <a:prstGeom prst="rect">
             <a:avLst/>
@@ -3423,10 +3520,10 @@
             <a:r>
               <a:rPr sz="1400" b="0" i="0">
                 <a:solidFill>
-                  <a:srgbClr val="666666"/>
+                  <a:srgbClr val="26231F"/>
                 </a:solidFill>
               </a:rPr>
-              <a:t>아이와 함께 · 2027. 00. 00</a:t>
+              <a:t>아이와 함께 · 날짜 입력</a:t>
             </a:r>
           </a:p>
         </p:txBody>
@@ -3445,7 +3542,7 @@
     <p:bg>
       <p:bgPr>
         <a:solidFill>
-          <a:srgbClr val="EEF5FC"/>
+          <a:srgbClr val="FFFFFF"/>
         </a:solidFill>
         <a:effectLst/>
       </p:bgPr>
@@ -3464,18 +3561,15 @@
           <p:nvPr/>
         </p:nvSpPr>
         <p:spPr>
-          <a:xfrm rot="10800000">
-            <a:off x="10637215" y="0"/>
-            <a:ext cx="914400" cy="1554480"/>
-          </a:xfrm>
-          <a:prstGeom prst="round2SameRect">
-            <a:avLst>
-              <a:gd name="adj1" fmla="val 50000"/>
-              <a:gd name="adj2" fmla="val 0"/>
-            </a:avLst>
+          <a:xfrm>
+            <a:off x="640080" y="566928"/>
+            <a:ext cx="10911535" cy="10972"/>
+          </a:xfrm>
+          <a:prstGeom prst="rect">
+            <a:avLst/>
           </a:prstGeom>
           <a:solidFill>
-            <a:srgbClr val="D1E7FA"/>
+            <a:srgbClr val="26231F"/>
           </a:solidFill>
           <a:ln>
             <a:noFill/>
@@ -3491,6 +3585,73 @@
       </p:sp>
       <p:sp>
         <p:nvSpPr>
+          <p:cNvPr id="4" name="상단 라벨"/>
+          <p:cNvSpPr txBox="1"/>
+          <p:nvPr/>
+        </p:nvSpPr>
+        <p:spPr>
+          <a:xfrm>
+            <a:off x="640080" y="237744"/>
+            <a:ext cx="5486400" cy="274320"/>
+          </a:xfrm>
+          <a:prstGeom prst="rect">
+            <a:avLst/>
+          </a:prstGeom>
+          <a:noFill/>
+        </p:spPr>
+        <p:txBody>
+          <a:bodyPr wrap="square" lIns="54864" rIns="54864" tIns="27432" bIns="27432" anchor="ctr">
+            <a:noAutofit/>
+          </a:bodyPr>
+          <a:lstStyle/>
+          <a:p>
+            <a:pPr algn="l">
+              <a:lnSpc>
+                <a:spcPct val="115000"/>
+              </a:lnSpc>
+            </a:pPr>
+            <a:r>
+              <a:rPr sz="900" b="1" i="0" spc="250">
+                <a:solidFill>
+                  <a:srgbClr val="26231F"/>
+                </a:solidFill>
+              </a:rPr>
+              <a:t>FAMILY ALBUM</a:t>
+            </a:r>
+          </a:p>
+        </p:txBody>
+      </p:sp>
+      <p:sp>
+        <p:nvSpPr>
+          <p:cNvPr id="5" name="포인트"/>
+          <p:cNvSpPr/>
+          <p:nvPr/>
+        </p:nvSpPr>
+        <p:spPr>
+          <a:xfrm>
+            <a:off x="11204143" y="246888"/>
+            <a:ext cx="237744" cy="237744"/>
+          </a:xfrm>
+          <a:prstGeom prst="heart">
+            <a:avLst/>
+          </a:prstGeom>
+          <a:solidFill>
+            <a:srgbClr val="7BB6EA"/>
+          </a:solidFill>
+          <a:ln>
+            <a:noFill/>
+          </a:ln>
+        </p:spPr>
+        <p:txBody>
+          <a:bodyPr rtlCol="0" anchor="ctr"/>
+          <a:lstStyle/>
+          <a:p>
+            <a:pPr algn="ctr"/>
+          </a:p>
+        </p:txBody>
+      </p:sp>
+      <p:sp>
+        <p:nvSpPr>
           <p:cNvPr id="2" name="Title 1"/>
           <p:cNvSpPr>
             <a:spLocks noGrp="1"/>
@@ -3501,8 +3662,8 @@
         </p:nvSpPr>
         <p:spPr>
           <a:xfrm>
-            <a:off x="640080" y="457200"/>
-            <a:ext cx="9722815" cy="868680"/>
+            <a:off x="640080" y="731520"/>
+            <a:ext cx="10911535" cy="822960"/>
           </a:xfrm>
         </p:spPr>
         <p:txBody>
@@ -3519,7 +3680,7 @@
             <a:r>
               <a:rPr sz="3000" b="1" i="0">
                 <a:solidFill>
-                  <a:srgbClr val="113B5F"/>
+                  <a:srgbClr val="26231F"/>
                 </a:solidFill>
               </a:rPr>
               <a:t>가족 구성원</a:t>
@@ -3529,13 +3690,13 @@
       </p:sp>
       <p:sp>
         <p:nvSpPr>
-          <p:cNvPr id="4" name="사진 자리"/>
+          <p:cNvPr id="6" name="사진 자리"/>
           <p:cNvSpPr/>
           <p:nvPr/>
         </p:nvSpPr>
         <p:spPr>
           <a:xfrm>
-            <a:off x="777239" y="1600200"/>
+            <a:off x="777239" y="1783080"/>
             <a:ext cx="2282113" cy="2282113"/>
           </a:xfrm>
           <a:prstGeom prst="ellipse">
@@ -3545,9 +3706,7 @@
             <a:srgbClr val="D1E7FA"/>
           </a:solidFill>
           <a:ln w="19050">
-            <a:solidFill>
-              <a:srgbClr val="267BC5"/>
-            </a:solidFill>
+            <a:noFill/>
             <a:prstDash val="dash"/>
           </a:ln>
         </p:spPr>
@@ -3565,7 +3724,7 @@
             <a:r>
               <a:rPr sz="1200" b="0" i="0">
                 <a:solidFill>
-                  <a:srgbClr val="113B5F"/>
+                  <a:srgbClr val="8E8780"/>
                 </a:solidFill>
               </a:rPr>
               <a:t>사진</a:t>
@@ -3575,13 +3734,13 @@
       </p:sp>
       <p:sp>
         <p:nvSpPr>
-          <p:cNvPr id="5" name="TextBox 4"/>
+          <p:cNvPr id="7" name="TextBox 6"/>
           <p:cNvSpPr txBox="1"/>
           <p:nvPr/>
         </p:nvSpPr>
         <p:spPr>
           <a:xfrm>
-            <a:off x="640080" y="3973753"/>
+            <a:off x="640080" y="4156633"/>
             <a:ext cx="2556433" cy="411480"/>
           </a:xfrm>
           <a:prstGeom prst="rect">
@@ -3603,7 +3762,7 @@
             <a:r>
               <a:rPr sz="1600" b="1" i="0">
                 <a:solidFill>
-                  <a:srgbClr val="113B5F"/>
+                  <a:srgbClr val="273949"/>
                 </a:solidFill>
               </a:rPr>
               <a:t>아빠</a:t>
@@ -3613,14 +3772,14 @@
       </p:sp>
       <p:sp>
         <p:nvSpPr>
-          <p:cNvPr id="6" name="TextBox 5"/>
+          <p:cNvPr id="8" name="TextBox 7"/>
           <p:cNvSpPr txBox="1"/>
           <p:nvPr/>
         </p:nvSpPr>
         <p:spPr>
           <a:xfrm>
-            <a:off x="731519" y="4430953"/>
-            <a:ext cx="2373553" cy="1969846"/>
+            <a:off x="731519" y="4613833"/>
+            <a:ext cx="2373553" cy="1741246"/>
           </a:xfrm>
           <a:prstGeom prst="rect">
             <a:avLst/>
@@ -3681,13 +3840,13 @@
       </p:sp>
       <p:sp>
         <p:nvSpPr>
-          <p:cNvPr id="7" name="사진 자리"/>
+          <p:cNvPr id="9" name="사진 자리"/>
           <p:cNvSpPr/>
           <p:nvPr/>
         </p:nvSpPr>
         <p:spPr>
           <a:xfrm>
-            <a:off x="3562273" y="1600200"/>
+            <a:off x="3562273" y="1783080"/>
             <a:ext cx="2282113" cy="2282113"/>
           </a:xfrm>
           <a:prstGeom prst="ellipse">
@@ -3697,9 +3856,7 @@
             <a:srgbClr val="D1E7FA"/>
           </a:solidFill>
           <a:ln w="19050">
-            <a:solidFill>
-              <a:srgbClr val="267BC5"/>
-            </a:solidFill>
+            <a:noFill/>
             <a:prstDash val="dash"/>
           </a:ln>
         </p:spPr>
@@ -3717,7 +3874,7 @@
             <a:r>
               <a:rPr sz="1200" b="0" i="0">
                 <a:solidFill>
-                  <a:srgbClr val="113B5F"/>
+                  <a:srgbClr val="8E8780"/>
                 </a:solidFill>
               </a:rPr>
               <a:t>사진</a:t>
@@ -3727,13 +3884,13 @@
       </p:sp>
       <p:sp>
         <p:nvSpPr>
-          <p:cNvPr id="8" name="TextBox 7"/>
+          <p:cNvPr id="10" name="TextBox 9"/>
           <p:cNvSpPr txBox="1"/>
           <p:nvPr/>
         </p:nvSpPr>
         <p:spPr>
           <a:xfrm>
-            <a:off x="3425113" y="3973753"/>
+            <a:off x="3425113" y="4156633"/>
             <a:ext cx="2556433" cy="411480"/>
           </a:xfrm>
           <a:prstGeom prst="rect">
@@ -3755,7 +3912,7 @@
             <a:r>
               <a:rPr sz="1600" b="1" i="0">
                 <a:solidFill>
-                  <a:srgbClr val="113B5F"/>
+                  <a:srgbClr val="273949"/>
                 </a:solidFill>
               </a:rPr>
               <a:t>엄마</a:t>
@@ -3765,14 +3922,14 @@
       </p:sp>
       <p:sp>
         <p:nvSpPr>
-          <p:cNvPr id="9" name="TextBox 8"/>
+          <p:cNvPr id="11" name="TextBox 10"/>
           <p:cNvSpPr txBox="1"/>
           <p:nvPr/>
         </p:nvSpPr>
         <p:spPr>
           <a:xfrm>
-            <a:off x="3516553" y="4430953"/>
-            <a:ext cx="2373553" cy="1969846"/>
+            <a:off x="3516553" y="4613833"/>
+            <a:ext cx="2373553" cy="1741246"/>
           </a:xfrm>
           <a:prstGeom prst="rect">
             <a:avLst/>
@@ -3833,13 +3990,13 @@
       </p:sp>
       <p:sp>
         <p:nvSpPr>
-          <p:cNvPr id="10" name="사진 자리"/>
+          <p:cNvPr id="12" name="사진 자리"/>
           <p:cNvSpPr/>
           <p:nvPr/>
         </p:nvSpPr>
         <p:spPr>
           <a:xfrm>
-            <a:off x="6347307" y="1600200"/>
+            <a:off x="6347307" y="1783080"/>
             <a:ext cx="2282113" cy="2282113"/>
           </a:xfrm>
           <a:prstGeom prst="ellipse">
@@ -3849,9 +4006,7 @@
             <a:srgbClr val="D1E7FA"/>
           </a:solidFill>
           <a:ln w="19050">
-            <a:solidFill>
-              <a:srgbClr val="267BC5"/>
-            </a:solidFill>
+            <a:noFill/>
             <a:prstDash val="dash"/>
           </a:ln>
         </p:spPr>
@@ -3869,7 +4024,7 @@
             <a:r>
               <a:rPr sz="1200" b="0" i="0">
                 <a:solidFill>
-                  <a:srgbClr val="113B5F"/>
+                  <a:srgbClr val="8E8780"/>
                 </a:solidFill>
               </a:rPr>
               <a:t>사진</a:t>
@@ -3879,13 +4034,13 @@
       </p:sp>
       <p:sp>
         <p:nvSpPr>
-          <p:cNvPr id="11" name="TextBox 10"/>
+          <p:cNvPr id="13" name="TextBox 12"/>
           <p:cNvSpPr txBox="1"/>
           <p:nvPr/>
         </p:nvSpPr>
         <p:spPr>
           <a:xfrm>
-            <a:off x="6210147" y="3973753"/>
+            <a:off x="6210147" y="4156633"/>
             <a:ext cx="2556433" cy="411480"/>
           </a:xfrm>
           <a:prstGeom prst="rect">
@@ -3907,7 +4062,7 @@
             <a:r>
               <a:rPr sz="1600" b="1" i="0">
                 <a:solidFill>
-                  <a:srgbClr val="113B5F"/>
+                  <a:srgbClr val="273949"/>
                 </a:solidFill>
               </a:rPr>
               <a:t>첫째</a:t>
@@ -3917,14 +4072,14 @@
       </p:sp>
       <p:sp>
         <p:nvSpPr>
-          <p:cNvPr id="12" name="TextBox 11"/>
+          <p:cNvPr id="14" name="TextBox 13"/>
           <p:cNvSpPr txBox="1"/>
           <p:nvPr/>
         </p:nvSpPr>
         <p:spPr>
           <a:xfrm>
-            <a:off x="6301587" y="4430953"/>
-            <a:ext cx="2373553" cy="1969846"/>
+            <a:off x="6301587" y="4613833"/>
+            <a:ext cx="2373553" cy="1741246"/>
           </a:xfrm>
           <a:prstGeom prst="rect">
             <a:avLst/>
@@ -3985,13 +4140,13 @@
       </p:sp>
       <p:sp>
         <p:nvSpPr>
-          <p:cNvPr id="13" name="사진 자리"/>
+          <p:cNvPr id="15" name="사진 자리"/>
           <p:cNvSpPr/>
           <p:nvPr/>
         </p:nvSpPr>
         <p:spPr>
           <a:xfrm>
-            <a:off x="9132341" y="1600200"/>
+            <a:off x="9132341" y="1783080"/>
             <a:ext cx="2282113" cy="2282113"/>
           </a:xfrm>
           <a:prstGeom prst="ellipse">
@@ -4001,9 +4156,7 @@
             <a:srgbClr val="D1E7FA"/>
           </a:solidFill>
           <a:ln w="19050">
-            <a:solidFill>
-              <a:srgbClr val="267BC5"/>
-            </a:solidFill>
+            <a:noFill/>
             <a:prstDash val="dash"/>
           </a:ln>
         </p:spPr>
@@ -4021,7 +4174,7 @@
             <a:r>
               <a:rPr sz="1200" b="0" i="0">
                 <a:solidFill>
-                  <a:srgbClr val="113B5F"/>
+                  <a:srgbClr val="8E8780"/>
                 </a:solidFill>
               </a:rPr>
               <a:t>사진</a:t>
@@ -4031,13 +4184,13 @@
       </p:sp>
       <p:sp>
         <p:nvSpPr>
-          <p:cNvPr id="14" name="TextBox 13"/>
+          <p:cNvPr id="16" name="TextBox 15"/>
           <p:cNvSpPr txBox="1"/>
           <p:nvPr/>
         </p:nvSpPr>
         <p:spPr>
           <a:xfrm>
-            <a:off x="8995181" y="3973753"/>
+            <a:off x="8995181" y="4156633"/>
             <a:ext cx="2556433" cy="411480"/>
           </a:xfrm>
           <a:prstGeom prst="rect">
@@ -4059,7 +4212,7 @@
             <a:r>
               <a:rPr sz="1600" b="1" i="0">
                 <a:solidFill>
-                  <a:srgbClr val="113B5F"/>
+                  <a:srgbClr val="273949"/>
                 </a:solidFill>
               </a:rPr>
               <a:t>둘째</a:t>
@@ -4069,14 +4222,14 @@
       </p:sp>
       <p:sp>
         <p:nvSpPr>
-          <p:cNvPr id="15" name="TextBox 14"/>
+          <p:cNvPr id="17" name="TextBox 16"/>
           <p:cNvSpPr txBox="1"/>
           <p:nvPr/>
         </p:nvSpPr>
         <p:spPr>
           <a:xfrm>
-            <a:off x="9086621" y="4430953"/>
-            <a:ext cx="2373553" cy="1969846"/>
+            <a:off x="9086621" y="4613833"/>
+            <a:ext cx="2373553" cy="1741246"/>
           </a:xfrm>
           <a:prstGeom prst="rect">
             <a:avLst/>
@@ -4149,7 +4302,7 @@
     <p:bg>
       <p:bgPr>
         <a:solidFill>
-          <a:srgbClr val="EEF5FC"/>
+          <a:srgbClr val="FFFFFF"/>
         </a:solidFill>
         <a:effectLst/>
       </p:bgPr>
@@ -4168,15 +4321,146 @@
           <p:nvPr/>
         </p:nvSpPr>
         <p:spPr>
-          <a:xfrm rot="10800000">
-            <a:off x="10637215" y="0"/>
-            <a:ext cx="914400" cy="1554480"/>
-          </a:xfrm>
-          <a:prstGeom prst="round2SameRect">
-            <a:avLst>
-              <a:gd name="adj1" fmla="val 50000"/>
-              <a:gd name="adj2" fmla="val 0"/>
-            </a:avLst>
+          <a:xfrm>
+            <a:off x="640080" y="566928"/>
+            <a:ext cx="10911535" cy="10972"/>
+          </a:xfrm>
+          <a:prstGeom prst="rect">
+            <a:avLst/>
+          </a:prstGeom>
+          <a:solidFill>
+            <a:srgbClr val="26231F"/>
+          </a:solidFill>
+          <a:ln>
+            <a:noFill/>
+          </a:ln>
+        </p:spPr>
+        <p:txBody>
+          <a:bodyPr rtlCol="0" anchor="ctr"/>
+          <a:lstStyle/>
+          <a:p>
+            <a:pPr algn="ctr"/>
+          </a:p>
+        </p:txBody>
+      </p:sp>
+      <p:sp>
+        <p:nvSpPr>
+          <p:cNvPr id="4" name="상단 라벨"/>
+          <p:cNvSpPr txBox="1"/>
+          <p:nvPr/>
+        </p:nvSpPr>
+        <p:spPr>
+          <a:xfrm>
+            <a:off x="640080" y="237744"/>
+            <a:ext cx="5486400" cy="274320"/>
+          </a:xfrm>
+          <a:prstGeom prst="rect">
+            <a:avLst/>
+          </a:prstGeom>
+          <a:noFill/>
+        </p:spPr>
+        <p:txBody>
+          <a:bodyPr wrap="square" lIns="54864" rIns="54864" tIns="27432" bIns="27432" anchor="ctr">
+            <a:noAutofit/>
+          </a:bodyPr>
+          <a:lstStyle/>
+          <a:p>
+            <a:pPr algn="l">
+              <a:lnSpc>
+                <a:spcPct val="115000"/>
+              </a:lnSpc>
+            </a:pPr>
+            <a:r>
+              <a:rPr sz="900" b="1" i="0" spc="250">
+                <a:solidFill>
+                  <a:srgbClr val="26231F"/>
+                </a:solidFill>
+              </a:rPr>
+              <a:t>FAMILY ALBUM</a:t>
+            </a:r>
+          </a:p>
+        </p:txBody>
+      </p:sp>
+      <p:sp>
+        <p:nvSpPr>
+          <p:cNvPr id="5" name="포인트"/>
+          <p:cNvSpPr/>
+          <p:nvPr/>
+        </p:nvSpPr>
+        <p:spPr>
+          <a:xfrm>
+            <a:off x="11204143" y="246888"/>
+            <a:ext cx="237744" cy="237744"/>
+          </a:xfrm>
+          <a:prstGeom prst="heart">
+            <a:avLst/>
+          </a:prstGeom>
+          <a:solidFill>
+            <a:srgbClr val="7BB6EA"/>
+          </a:solidFill>
+          <a:ln>
+            <a:noFill/>
+          </a:ln>
+        </p:spPr>
+        <p:txBody>
+          <a:bodyPr rtlCol="0" anchor="ctr"/>
+          <a:lstStyle/>
+          <a:p>
+            <a:pPr algn="ctr"/>
+          </a:p>
+        </p:txBody>
+      </p:sp>
+      <p:sp>
+        <p:nvSpPr>
+          <p:cNvPr id="2" name="Title 1"/>
+          <p:cNvSpPr>
+            <a:spLocks noGrp="1"/>
+          </p:cNvSpPr>
+          <p:nvPr>
+            <p:ph type="title"/>
+          </p:nvPr>
+        </p:nvSpPr>
+        <p:spPr>
+          <a:xfrm>
+            <a:off x="640080" y="731520"/>
+            <a:ext cx="10911535" cy="822960"/>
+          </a:xfrm>
+        </p:spPr>
+        <p:txBody>
+          <a:bodyPr wrap="square" lIns="54864" rIns="54864" tIns="27432" bIns="27432" anchor="ctr">
+            <a:noAutofit/>
+          </a:bodyPr>
+          <a:lstStyle/>
+          <a:p>
+            <a:pPr algn="l">
+              <a:lnSpc>
+                <a:spcPct val="105000"/>
+              </a:lnSpc>
+            </a:pPr>
+            <a:r>
+              <a:rPr sz="3000" b="1" i="0">
+                <a:solidFill>
+                  <a:srgbClr val="26231F"/>
+                </a:solidFill>
+              </a:rPr>
+              <a:t>우리 가족 이야기</a:t>
+            </a:r>
+          </a:p>
+        </p:txBody>
+      </p:sp>
+      <p:sp>
+        <p:nvSpPr>
+          <p:cNvPr id="6" name="타임라인 선"/>
+          <p:cNvSpPr/>
+          <p:nvPr/>
+        </p:nvSpPr>
+        <p:spPr>
+          <a:xfrm>
+            <a:off x="640080" y="3520440"/>
+            <a:ext cx="10911535" cy="54864"/>
+          </a:xfrm>
+          <a:prstGeom prst="rect">
+            <a:avLst/>
           </a:prstGeom>
           <a:solidFill>
             <a:srgbClr val="D1E7FA"/>
@@ -4195,87 +4479,20 @@
       </p:sp>
       <p:sp>
         <p:nvSpPr>
-          <p:cNvPr id="2" name="Title 1"/>
-          <p:cNvSpPr>
-            <a:spLocks noGrp="1"/>
-          </p:cNvSpPr>
-          <p:nvPr>
-            <p:ph type="title"/>
-          </p:nvPr>
-        </p:nvSpPr>
-        <p:spPr>
-          <a:xfrm>
-            <a:off x="640080" y="457200"/>
-            <a:ext cx="9722815" cy="868680"/>
-          </a:xfrm>
-        </p:spPr>
-        <p:txBody>
-          <a:bodyPr wrap="square" lIns="54864" rIns="54864" tIns="27432" bIns="27432" anchor="ctr">
-            <a:noAutofit/>
-          </a:bodyPr>
-          <a:lstStyle/>
-          <a:p>
-            <a:pPr algn="l">
-              <a:lnSpc>
-                <a:spcPct val="105000"/>
-              </a:lnSpc>
-            </a:pPr>
-            <a:r>
-              <a:rPr sz="3000" b="1" i="0">
-                <a:solidFill>
-                  <a:srgbClr val="113B5F"/>
-                </a:solidFill>
-              </a:rPr>
-              <a:t>우리 가족 이야기</a:t>
-            </a:r>
-          </a:p>
-        </p:txBody>
-      </p:sp>
-      <p:sp>
-        <p:nvSpPr>
-          <p:cNvPr id="4" name="타임라인 선"/>
+          <p:cNvPr id="7" name="때 1"/>
           <p:cNvSpPr/>
           <p:nvPr/>
         </p:nvSpPr>
         <p:spPr>
           <a:xfrm>
-            <a:off x="640080" y="3337560"/>
-            <a:ext cx="10911535" cy="54864"/>
-          </a:xfrm>
-          <a:prstGeom prst="rect">
-            <a:avLst/>
-          </a:prstGeom>
-          <a:solidFill>
-            <a:srgbClr val="D1E7FA"/>
-          </a:solidFill>
-          <a:ln>
-            <a:noFill/>
-          </a:ln>
-        </p:spPr>
-        <p:txBody>
-          <a:bodyPr rtlCol="0" anchor="ctr"/>
-          <a:lstStyle/>
-          <a:p>
-            <a:pPr algn="ctr"/>
-          </a:p>
-        </p:txBody>
-      </p:sp>
-      <p:sp>
-        <p:nvSpPr>
-          <p:cNvPr id="5" name="때 1"/>
-          <p:cNvSpPr/>
-          <p:nvPr/>
-        </p:nvSpPr>
-        <p:spPr>
-          <a:xfrm>
-            <a:off x="1802853" y="3154680"/>
+            <a:off x="1802853" y="3337560"/>
             <a:ext cx="402336" cy="402336"/>
           </a:xfrm>
           <a:prstGeom prst="ellipse">
             <a:avLst/>
           </a:prstGeom>
           <a:solidFill>
-            <a:srgbClr val="267BC5"/>
+            <a:srgbClr val="7BB6EA"/>
           </a:solidFill>
           <a:ln w="38100">
             <a:solidFill>
@@ -4293,13 +4510,13 @@
       </p:sp>
       <p:sp>
         <p:nvSpPr>
-          <p:cNvPr id="6" name="TextBox 5"/>
+          <p:cNvPr id="8" name="TextBox 7"/>
           <p:cNvSpPr txBox="1"/>
           <p:nvPr/>
         </p:nvSpPr>
         <p:spPr>
           <a:xfrm>
-            <a:off x="685800" y="2514600"/>
+            <a:off x="685800" y="2697480"/>
             <a:ext cx="2636443" cy="457200"/>
           </a:xfrm>
           <a:prstGeom prst="rect">
@@ -4321,7 +4538,7 @@
             <a:r>
               <a:rPr sz="1600" b="1" i="0">
                 <a:solidFill>
-                  <a:srgbClr val="267BC5"/>
+                  <a:srgbClr val="7BB6EA"/>
                 </a:solidFill>
               </a:rPr>
               <a:t>가족이 된 날</a:t>
@@ -4331,13 +4548,13 @@
       </p:sp>
       <p:sp>
         <p:nvSpPr>
-          <p:cNvPr id="7" name="TextBox 6"/>
+          <p:cNvPr id="9" name="TextBox 8"/>
           <p:cNvSpPr txBox="1"/>
           <p:nvPr/>
         </p:nvSpPr>
         <p:spPr>
           <a:xfrm>
-            <a:off x="731519" y="3703320"/>
+            <a:off x="731519" y="3886200"/>
             <a:ext cx="2545003" cy="457200"/>
           </a:xfrm>
           <a:prstGeom prst="rect">
@@ -4359,7 +4576,7 @@
             <a:r>
               <a:rPr sz="1800" b="1" i="0">
                 <a:solidFill>
-                  <a:srgbClr val="113B5F"/>
+                  <a:srgbClr val="273949"/>
                 </a:solidFill>
               </a:rPr>
               <a:t>우리의 시작</a:t>
@@ -4369,13 +4586,13 @@
       </p:sp>
       <p:sp>
         <p:nvSpPr>
-          <p:cNvPr id="8" name="TextBox 7"/>
+          <p:cNvPr id="10" name="TextBox 9"/>
           <p:cNvSpPr txBox="1"/>
           <p:nvPr/>
         </p:nvSpPr>
         <p:spPr>
           <a:xfrm>
-            <a:off x="731519" y="4206240"/>
+            <a:off x="731519" y="4389120"/>
             <a:ext cx="2545003" cy="1645920"/>
           </a:xfrm>
           <a:prstGeom prst="rect">
@@ -4397,7 +4614,7 @@
             <a:r>
               <a:rPr sz="1500" b="0" i="0">
                 <a:solidFill>
-                  <a:srgbClr val="2B2B2B"/>
+                  <a:srgbClr val="26231F"/>
                 </a:solidFill>
               </a:rPr>
               <a:t>처음 만난 날의 이야기</a:t>
@@ -4407,20 +4624,20 @@
       </p:sp>
       <p:sp>
         <p:nvSpPr>
-          <p:cNvPr id="9" name="때 2"/>
+          <p:cNvPr id="11" name="때 2"/>
           <p:cNvSpPr/>
           <p:nvPr/>
         </p:nvSpPr>
         <p:spPr>
           <a:xfrm>
-            <a:off x="4530737" y="3154680"/>
+            <a:off x="4530737" y="3337560"/>
             <a:ext cx="402336" cy="402336"/>
           </a:xfrm>
           <a:prstGeom prst="ellipse">
             <a:avLst/>
           </a:prstGeom>
           <a:solidFill>
-            <a:srgbClr val="267BC5"/>
+            <a:srgbClr val="7BB6EA"/>
           </a:solidFill>
           <a:ln w="38100">
             <a:solidFill>
@@ -4438,13 +4655,13 @@
       </p:sp>
       <p:sp>
         <p:nvSpPr>
-          <p:cNvPr id="10" name="TextBox 9"/>
+          <p:cNvPr id="12" name="TextBox 11"/>
           <p:cNvSpPr txBox="1"/>
           <p:nvPr/>
         </p:nvSpPr>
         <p:spPr>
           <a:xfrm>
-            <a:off x="3413683" y="2514600"/>
+            <a:off x="3413683" y="2697480"/>
             <a:ext cx="2636443" cy="457200"/>
           </a:xfrm>
           <a:prstGeom prst="rect">
@@ -4466,7 +4683,7 @@
             <a:r>
               <a:rPr sz="1600" b="1" i="0">
                 <a:solidFill>
-                  <a:srgbClr val="267BC5"/>
+                  <a:srgbClr val="7BB6EA"/>
                 </a:solidFill>
               </a:rPr>
               <a:t>아이가 태어난 날</a:t>
@@ -4476,13 +4693,13 @@
       </p:sp>
       <p:sp>
         <p:nvSpPr>
-          <p:cNvPr id="11" name="TextBox 10"/>
+          <p:cNvPr id="13" name="TextBox 12"/>
           <p:cNvSpPr txBox="1"/>
           <p:nvPr/>
         </p:nvSpPr>
         <p:spPr>
           <a:xfrm>
-            <a:off x="3459403" y="3703320"/>
+            <a:off x="3459403" y="3886200"/>
             <a:ext cx="2545003" cy="457200"/>
           </a:xfrm>
           <a:prstGeom prst="rect">
@@ -4504,7 +4721,7 @@
             <a:r>
               <a:rPr sz="1800" b="1" i="0">
                 <a:solidFill>
-                  <a:srgbClr val="113B5F"/>
+                  <a:srgbClr val="273949"/>
                 </a:solidFill>
               </a:rPr>
               <a:t>새 식구</a:t>
@@ -4514,13 +4731,13 @@
       </p:sp>
       <p:sp>
         <p:nvSpPr>
-          <p:cNvPr id="12" name="TextBox 11"/>
+          <p:cNvPr id="14" name="TextBox 13"/>
           <p:cNvSpPr txBox="1"/>
           <p:nvPr/>
         </p:nvSpPr>
         <p:spPr>
           <a:xfrm>
-            <a:off x="3459403" y="4206240"/>
+            <a:off x="3459403" y="4389120"/>
             <a:ext cx="2545003" cy="1645920"/>
           </a:xfrm>
           <a:prstGeom prst="rect">
@@ -4542,7 +4759,7 @@
             <a:r>
               <a:rPr sz="1500" b="0" i="0">
                 <a:solidFill>
-                  <a:srgbClr val="2B2B2B"/>
+                  <a:srgbClr val="26231F"/>
                 </a:solidFill>
               </a:rPr>
               <a:t>그날의 기억을 적어요</a:t>
@@ -4552,20 +4769,20 @@
       </p:sp>
       <p:sp>
         <p:nvSpPr>
-          <p:cNvPr id="13" name="때 3"/>
+          <p:cNvPr id="15" name="때 3"/>
           <p:cNvSpPr/>
           <p:nvPr/>
         </p:nvSpPr>
         <p:spPr>
           <a:xfrm>
-            <a:off x="7258621" y="3154680"/>
+            <a:off x="7258621" y="3337560"/>
             <a:ext cx="402336" cy="402336"/>
           </a:xfrm>
           <a:prstGeom prst="ellipse">
             <a:avLst/>
           </a:prstGeom>
           <a:solidFill>
-            <a:srgbClr val="267BC5"/>
+            <a:srgbClr val="7BB6EA"/>
           </a:solidFill>
           <a:ln w="38100">
             <a:solidFill>
@@ -4583,13 +4800,13 @@
       </p:sp>
       <p:sp>
         <p:nvSpPr>
-          <p:cNvPr id="14" name="TextBox 13"/>
+          <p:cNvPr id="16" name="TextBox 15"/>
           <p:cNvSpPr txBox="1"/>
           <p:nvPr/>
         </p:nvSpPr>
         <p:spPr>
           <a:xfrm>
-            <a:off x="6141567" y="2514600"/>
+            <a:off x="6141567" y="2697480"/>
             <a:ext cx="2636443" cy="457200"/>
           </a:xfrm>
           <a:prstGeom prst="rect">
@@ -4611,7 +4828,7 @@
             <a:r>
               <a:rPr sz="1600" b="1" i="0">
                 <a:solidFill>
-                  <a:srgbClr val="267BC5"/>
+                  <a:srgbClr val="7BB6EA"/>
                 </a:solidFill>
               </a:rPr>
               <a:t>첫 가족 여행</a:t>
@@ -4621,13 +4838,13 @@
       </p:sp>
       <p:sp>
         <p:nvSpPr>
-          <p:cNvPr id="15" name="TextBox 14"/>
+          <p:cNvPr id="17" name="TextBox 16"/>
           <p:cNvSpPr txBox="1"/>
           <p:nvPr/>
         </p:nvSpPr>
         <p:spPr>
           <a:xfrm>
-            <a:off x="6187287" y="3703320"/>
+            <a:off x="6187287" y="3886200"/>
             <a:ext cx="2545003" cy="457200"/>
           </a:xfrm>
           <a:prstGeom prst="rect">
@@ -4649,7 +4866,7 @@
             <a:r>
               <a:rPr sz="1800" b="1" i="0">
                 <a:solidFill>
-                  <a:srgbClr val="113B5F"/>
+                  <a:srgbClr val="273949"/>
                 </a:solidFill>
               </a:rPr>
               <a:t>함께 떠난 길</a:t>
@@ -4659,13 +4876,13 @@
       </p:sp>
       <p:sp>
         <p:nvSpPr>
-          <p:cNvPr id="16" name="TextBox 15"/>
+          <p:cNvPr id="18" name="TextBox 17"/>
           <p:cNvSpPr txBox="1"/>
           <p:nvPr/>
         </p:nvSpPr>
         <p:spPr>
           <a:xfrm>
-            <a:off x="6187287" y="4206240"/>
+            <a:off x="6187287" y="4389120"/>
             <a:ext cx="2545003" cy="1645920"/>
           </a:xfrm>
           <a:prstGeom prst="rect">
@@ -4687,7 +4904,7 @@
             <a:r>
               <a:rPr sz="1500" b="0" i="0">
                 <a:solidFill>
-                  <a:srgbClr val="2B2B2B"/>
+                  <a:srgbClr val="26231F"/>
                 </a:solidFill>
               </a:rPr>
               <a:t>가장 웃었던 순간</a:t>
@@ -4697,20 +4914,20 @@
       </p:sp>
       <p:sp>
         <p:nvSpPr>
-          <p:cNvPr id="17" name="때 4"/>
+          <p:cNvPr id="19" name="때 4"/>
           <p:cNvSpPr/>
           <p:nvPr/>
         </p:nvSpPr>
         <p:spPr>
           <a:xfrm>
-            <a:off x="9986505" y="3154680"/>
+            <a:off x="9986505" y="3337560"/>
             <a:ext cx="402336" cy="402336"/>
           </a:xfrm>
           <a:prstGeom prst="ellipse">
             <a:avLst/>
           </a:prstGeom>
           <a:solidFill>
-            <a:srgbClr val="267BC5"/>
+            <a:srgbClr val="7BB6EA"/>
           </a:solidFill>
           <a:ln w="38100">
             <a:solidFill>
@@ -4728,13 +4945,13 @@
       </p:sp>
       <p:sp>
         <p:nvSpPr>
-          <p:cNvPr id="18" name="TextBox 17"/>
+          <p:cNvPr id="20" name="TextBox 19"/>
           <p:cNvSpPr txBox="1"/>
           <p:nvPr/>
         </p:nvSpPr>
         <p:spPr>
           <a:xfrm>
-            <a:off x="8869451" y="2514600"/>
+            <a:off x="8869451" y="2697480"/>
             <a:ext cx="2636443" cy="457200"/>
           </a:xfrm>
           <a:prstGeom prst="rect">
@@ -4756,7 +4973,7 @@
             <a:r>
               <a:rPr sz="1600" b="1" i="0">
                 <a:solidFill>
-                  <a:srgbClr val="267BC5"/>
+                  <a:srgbClr val="7BB6EA"/>
                 </a:solidFill>
               </a:rPr>
               <a:t>지금</a:t>
@@ -4766,13 +4983,13 @@
       </p:sp>
       <p:sp>
         <p:nvSpPr>
-          <p:cNvPr id="19" name="TextBox 18"/>
+          <p:cNvPr id="21" name="TextBox 20"/>
           <p:cNvSpPr txBox="1"/>
           <p:nvPr/>
         </p:nvSpPr>
         <p:spPr>
           <a:xfrm>
-            <a:off x="8915171" y="3703320"/>
+            <a:off x="8915171" y="3886200"/>
             <a:ext cx="2545003" cy="457200"/>
           </a:xfrm>
           <a:prstGeom prst="rect">
@@ -4794,7 +5011,7 @@
             <a:r>
               <a:rPr sz="1800" b="1" i="0">
                 <a:solidFill>
-                  <a:srgbClr val="113B5F"/>
+                  <a:srgbClr val="273949"/>
                 </a:solidFill>
               </a:rPr>
               <a:t>오늘의 우리</a:t>
@@ -4804,13 +5021,13 @@
       </p:sp>
       <p:sp>
         <p:nvSpPr>
-          <p:cNvPr id="20" name="TextBox 19"/>
+          <p:cNvPr id="22" name="TextBox 21"/>
           <p:cNvSpPr txBox="1"/>
           <p:nvPr/>
         </p:nvSpPr>
         <p:spPr>
           <a:xfrm>
-            <a:off x="8915171" y="4206240"/>
+            <a:off x="8915171" y="4389120"/>
             <a:ext cx="2545003" cy="1645920"/>
           </a:xfrm>
           <a:prstGeom prst="rect">
@@ -4832,7 +5049,7 @@
             <a:r>
               <a:rPr sz="1500" b="0" i="0">
                 <a:solidFill>
-                  <a:srgbClr val="2B2B2B"/>
+                  <a:srgbClr val="26231F"/>
                 </a:solidFill>
               </a:rPr>
               <a:t>요즘 우리 이야기</a:t>
@@ -4854,7 +5071,7 @@
     <p:bg>
       <p:bgPr>
         <a:solidFill>
-          <a:srgbClr val="EEF5FC"/>
+          <a:srgbClr val="FFFFFF"/>
         </a:solidFill>
         <a:effectLst/>
       </p:bgPr>
@@ -4873,18 +5090,15 @@
           <p:nvPr/>
         </p:nvSpPr>
         <p:spPr>
-          <a:xfrm rot="10800000">
-            <a:off x="10637215" y="0"/>
-            <a:ext cx="914400" cy="1554480"/>
-          </a:xfrm>
-          <a:prstGeom prst="round2SameRect">
-            <a:avLst>
-              <a:gd name="adj1" fmla="val 50000"/>
-              <a:gd name="adj2" fmla="val 0"/>
-            </a:avLst>
+          <a:xfrm>
+            <a:off x="640080" y="566928"/>
+            <a:ext cx="10911535" cy="10972"/>
+          </a:xfrm>
+          <a:prstGeom prst="rect">
+            <a:avLst/>
           </a:prstGeom>
           <a:solidFill>
-            <a:srgbClr val="D1E7FA"/>
+            <a:srgbClr val="26231F"/>
           </a:solidFill>
           <a:ln>
             <a:noFill/>
@@ -4900,6 +5114,73 @@
       </p:sp>
       <p:sp>
         <p:nvSpPr>
+          <p:cNvPr id="4" name="상단 라벨"/>
+          <p:cNvSpPr txBox="1"/>
+          <p:nvPr/>
+        </p:nvSpPr>
+        <p:spPr>
+          <a:xfrm>
+            <a:off x="640080" y="237744"/>
+            <a:ext cx="5486400" cy="274320"/>
+          </a:xfrm>
+          <a:prstGeom prst="rect">
+            <a:avLst/>
+          </a:prstGeom>
+          <a:noFill/>
+        </p:spPr>
+        <p:txBody>
+          <a:bodyPr wrap="square" lIns="54864" rIns="54864" tIns="27432" bIns="27432" anchor="ctr">
+            <a:noAutofit/>
+          </a:bodyPr>
+          <a:lstStyle/>
+          <a:p>
+            <a:pPr algn="l">
+              <a:lnSpc>
+                <a:spcPct val="115000"/>
+              </a:lnSpc>
+            </a:pPr>
+            <a:r>
+              <a:rPr sz="900" b="1" i="0" spc="250">
+                <a:solidFill>
+                  <a:srgbClr val="26231F"/>
+                </a:solidFill>
+              </a:rPr>
+              <a:t>FAMILY ALBUM</a:t>
+            </a:r>
+          </a:p>
+        </p:txBody>
+      </p:sp>
+      <p:sp>
+        <p:nvSpPr>
+          <p:cNvPr id="5" name="포인트"/>
+          <p:cNvSpPr/>
+          <p:nvPr/>
+        </p:nvSpPr>
+        <p:spPr>
+          <a:xfrm>
+            <a:off x="11204143" y="246888"/>
+            <a:ext cx="237744" cy="237744"/>
+          </a:xfrm>
+          <a:prstGeom prst="heart">
+            <a:avLst/>
+          </a:prstGeom>
+          <a:solidFill>
+            <a:srgbClr val="7BB6EA"/>
+          </a:solidFill>
+          <a:ln>
+            <a:noFill/>
+          </a:ln>
+        </p:spPr>
+        <p:txBody>
+          <a:bodyPr rtlCol="0" anchor="ctr"/>
+          <a:lstStyle/>
+          <a:p>
+            <a:pPr algn="ctr"/>
+          </a:p>
+        </p:txBody>
+      </p:sp>
+      <p:sp>
+        <p:nvSpPr>
           <p:cNvPr id="2" name="Title 1"/>
           <p:cNvSpPr>
             <a:spLocks noGrp="1"/>
@@ -4910,8 +5191,8 @@
         </p:nvSpPr>
         <p:spPr>
           <a:xfrm>
-            <a:off x="640080" y="457200"/>
-            <a:ext cx="9722815" cy="868680"/>
+            <a:off x="640080" y="731520"/>
+            <a:ext cx="10911535" cy="822960"/>
           </a:xfrm>
         </p:spPr>
         <p:txBody>
@@ -4928,7 +5209,7 @@
             <a:r>
               <a:rPr sz="3000" b="1" i="0">
                 <a:solidFill>
-                  <a:srgbClr val="113B5F"/>
+                  <a:srgbClr val="26231F"/>
                 </a:solidFill>
               </a:rPr>
               <a:t>우리 가족의 약속</a:t>
@@ -4938,27 +5219,25 @@
       </p:sp>
       <p:sp>
         <p:nvSpPr>
-          <p:cNvPr id="4" name="줄 1"/>
+          <p:cNvPr id="6" name="줄 1"/>
           <p:cNvSpPr/>
           <p:nvPr/>
         </p:nvSpPr>
         <p:spPr>
           <a:xfrm>
-            <a:off x="640080" y="1600200"/>
+            <a:off x="640080" y="1783080"/>
             <a:ext cx="10911535" cy="1005840"/>
           </a:xfrm>
           <a:prstGeom prst="roundRect">
             <a:avLst>
-              <a:gd name="adj" fmla="val 8000"/>
+              <a:gd name="adj" fmla="val 7000"/>
             </a:avLst>
           </a:prstGeom>
           <a:solidFill>
-            <a:srgbClr val="EEF5FC"/>
+            <a:srgbClr val="EAF4FD"/>
           </a:solidFill>
-          <a:ln w="12700">
-            <a:solidFill>
-              <a:srgbClr val="D1E7FA"/>
-            </a:solidFill>
+          <a:ln>
+            <a:noFill/>
           </a:ln>
         </p:spPr>
         <p:txBody>
@@ -4971,20 +5250,20 @@
       </p:sp>
       <p:sp>
         <p:nvSpPr>
-          <p:cNvPr id="5" name="번호 1"/>
+          <p:cNvPr id="7" name="번호 1"/>
           <p:cNvSpPr/>
           <p:nvPr/>
         </p:nvSpPr>
         <p:spPr>
           <a:xfrm>
-            <a:off x="822959" y="1874519"/>
+            <a:off x="822959" y="2057400"/>
             <a:ext cx="457200" cy="457200"/>
           </a:xfrm>
           <a:prstGeom prst="ellipse">
             <a:avLst/>
           </a:prstGeom>
           <a:solidFill>
-            <a:srgbClr val="267BC5"/>
+            <a:srgbClr val="7BB6EA"/>
           </a:solidFill>
           <a:ln>
             <a:noFill/>
@@ -5004,7 +5283,7 @@
             <a:r>
               <a:rPr sz="1600" b="1" i="0">
                 <a:solidFill>
-                  <a:srgbClr val="FFFFFF"/>
+                  <a:srgbClr val="26231F"/>
                 </a:solidFill>
               </a:rPr>
               <a:t>1</a:t>
@@ -5014,13 +5293,13 @@
       </p:sp>
       <p:sp>
         <p:nvSpPr>
-          <p:cNvPr id="6" name="TextBox 5"/>
+          <p:cNvPr id="8" name="TextBox 7"/>
           <p:cNvSpPr txBox="1"/>
           <p:nvPr/>
         </p:nvSpPr>
         <p:spPr>
           <a:xfrm>
-            <a:off x="1508760" y="1645920"/>
+            <a:off x="1508760" y="1828800"/>
             <a:ext cx="2743200" cy="914400"/>
           </a:xfrm>
           <a:prstGeom prst="rect">
@@ -5042,7 +5321,7 @@
             <a:r>
               <a:rPr sz="1800" b="1" i="0">
                 <a:solidFill>
-                  <a:srgbClr val="113B5F"/>
+                  <a:srgbClr val="273949"/>
                 </a:solidFill>
               </a:rPr>
               <a:t>약속 1</a:t>
@@ -5052,13 +5331,13 @@
       </p:sp>
       <p:sp>
         <p:nvSpPr>
-          <p:cNvPr id="7" name="TextBox 6"/>
+          <p:cNvPr id="9" name="TextBox 8"/>
           <p:cNvSpPr txBox="1"/>
           <p:nvPr/>
         </p:nvSpPr>
         <p:spPr>
           <a:xfrm>
-            <a:off x="4297680" y="1645920"/>
+            <a:off x="4297680" y="1828800"/>
             <a:ext cx="7071055" cy="914400"/>
           </a:xfrm>
           <a:prstGeom prst="rect">
@@ -5080,7 +5359,7 @@
             <a:r>
               <a:rPr sz="1700" b="0" i="0">
                 <a:solidFill>
-                  <a:srgbClr val="2B2B2B"/>
+                  <a:srgbClr val="26231F"/>
                 </a:solidFill>
               </a:rPr>
               <a:t>밥은 꼭 함께 먹기</a:t>
@@ -5090,27 +5369,25 @@
       </p:sp>
       <p:sp>
         <p:nvSpPr>
-          <p:cNvPr id="8" name="줄 2"/>
+          <p:cNvPr id="10" name="줄 2"/>
           <p:cNvSpPr/>
           <p:nvPr/>
         </p:nvSpPr>
         <p:spPr>
           <a:xfrm>
-            <a:off x="640080" y="2743200"/>
+            <a:off x="640080" y="2926080"/>
             <a:ext cx="10911535" cy="1005840"/>
           </a:xfrm>
           <a:prstGeom prst="roundRect">
             <a:avLst>
-              <a:gd name="adj" fmla="val 8000"/>
+              <a:gd name="adj" fmla="val 7000"/>
             </a:avLst>
           </a:prstGeom>
           <a:solidFill>
-            <a:srgbClr val="EEF5FC"/>
+            <a:srgbClr val="EAF4FD"/>
           </a:solidFill>
-          <a:ln w="12700">
-            <a:solidFill>
-              <a:srgbClr val="D1E7FA"/>
-            </a:solidFill>
+          <a:ln>
+            <a:noFill/>
           </a:ln>
         </p:spPr>
         <p:txBody>
@@ -5123,20 +5400,20 @@
       </p:sp>
       <p:sp>
         <p:nvSpPr>
-          <p:cNvPr id="9" name="번호 2"/>
+          <p:cNvPr id="11" name="번호 2"/>
           <p:cNvSpPr/>
           <p:nvPr/>
         </p:nvSpPr>
         <p:spPr>
           <a:xfrm>
-            <a:off x="822959" y="3017520"/>
+            <a:off x="822959" y="3200400"/>
             <a:ext cx="457200" cy="457200"/>
           </a:xfrm>
           <a:prstGeom prst="ellipse">
             <a:avLst/>
           </a:prstGeom>
           <a:solidFill>
-            <a:srgbClr val="267BC5"/>
+            <a:srgbClr val="7BB6EA"/>
           </a:solidFill>
           <a:ln>
             <a:noFill/>
@@ -5156,7 +5433,7 @@
             <a:r>
               <a:rPr sz="1600" b="1" i="0">
                 <a:solidFill>
-                  <a:srgbClr val="FFFFFF"/>
+                  <a:srgbClr val="26231F"/>
                 </a:solidFill>
               </a:rPr>
               <a:t>2</a:t>
@@ -5166,13 +5443,13 @@
       </p:sp>
       <p:sp>
         <p:nvSpPr>
-          <p:cNvPr id="10" name="TextBox 9"/>
+          <p:cNvPr id="12" name="TextBox 11"/>
           <p:cNvSpPr txBox="1"/>
           <p:nvPr/>
         </p:nvSpPr>
         <p:spPr>
           <a:xfrm>
-            <a:off x="1508760" y="2788920"/>
+            <a:off x="1508760" y="2971800"/>
             <a:ext cx="2743200" cy="914400"/>
           </a:xfrm>
           <a:prstGeom prst="rect">
@@ -5194,7 +5471,7 @@
             <a:r>
               <a:rPr sz="1800" b="1" i="0">
                 <a:solidFill>
-                  <a:srgbClr val="113B5F"/>
+                  <a:srgbClr val="273949"/>
                 </a:solidFill>
               </a:rPr>
               <a:t>약속 2</a:t>
@@ -5204,13 +5481,13 @@
       </p:sp>
       <p:sp>
         <p:nvSpPr>
-          <p:cNvPr id="11" name="TextBox 10"/>
+          <p:cNvPr id="13" name="TextBox 12"/>
           <p:cNvSpPr txBox="1"/>
           <p:nvPr/>
         </p:nvSpPr>
         <p:spPr>
           <a:xfrm>
-            <a:off x="4297680" y="2788920"/>
+            <a:off x="4297680" y="2971800"/>
             <a:ext cx="7071055" cy="914400"/>
           </a:xfrm>
           <a:prstGeom prst="rect">
@@ -5232,7 +5509,7 @@
             <a:r>
               <a:rPr sz="1700" b="0" i="0">
                 <a:solidFill>
-                  <a:srgbClr val="2B2B2B"/>
+                  <a:srgbClr val="26231F"/>
                 </a:solidFill>
               </a:rPr>
               <a:t>잠들기 전에 사랑한다고 말하기</a:t>
@@ -5242,27 +5519,25 @@
       </p:sp>
       <p:sp>
         <p:nvSpPr>
-          <p:cNvPr id="12" name="줄 3"/>
+          <p:cNvPr id="14" name="줄 3"/>
           <p:cNvSpPr/>
           <p:nvPr/>
         </p:nvSpPr>
         <p:spPr>
           <a:xfrm>
-            <a:off x="640080" y="3886200"/>
+            <a:off x="640080" y="4069080"/>
             <a:ext cx="10911535" cy="1005840"/>
           </a:xfrm>
           <a:prstGeom prst="roundRect">
             <a:avLst>
-              <a:gd name="adj" fmla="val 8000"/>
+              <a:gd name="adj" fmla="val 7000"/>
             </a:avLst>
           </a:prstGeom>
           <a:solidFill>
-            <a:srgbClr val="EEF5FC"/>
+            <a:srgbClr val="EAF4FD"/>
           </a:solidFill>
-          <a:ln w="12700">
-            <a:solidFill>
-              <a:srgbClr val="D1E7FA"/>
-            </a:solidFill>
+          <a:ln>
+            <a:noFill/>
           </a:ln>
         </p:spPr>
         <p:txBody>
@@ -5275,20 +5550,20 @@
       </p:sp>
       <p:sp>
         <p:nvSpPr>
-          <p:cNvPr id="13" name="번호 3"/>
+          <p:cNvPr id="15" name="번호 3"/>
           <p:cNvSpPr/>
           <p:nvPr/>
         </p:nvSpPr>
         <p:spPr>
           <a:xfrm>
-            <a:off x="822959" y="4160520"/>
+            <a:off x="822959" y="4343400"/>
             <a:ext cx="457200" cy="457200"/>
           </a:xfrm>
           <a:prstGeom prst="ellipse">
             <a:avLst/>
           </a:prstGeom>
           <a:solidFill>
-            <a:srgbClr val="267BC5"/>
+            <a:srgbClr val="7BB6EA"/>
           </a:solidFill>
           <a:ln>
             <a:noFill/>
@@ -5308,7 +5583,7 @@
             <a:r>
               <a:rPr sz="1600" b="1" i="0">
                 <a:solidFill>
-                  <a:srgbClr val="FFFFFF"/>
+                  <a:srgbClr val="26231F"/>
                 </a:solidFill>
               </a:rPr>
               <a:t>3</a:t>
@@ -5318,13 +5593,13 @@
       </p:sp>
       <p:sp>
         <p:nvSpPr>
-          <p:cNvPr id="14" name="TextBox 13"/>
+          <p:cNvPr id="16" name="TextBox 15"/>
           <p:cNvSpPr txBox="1"/>
           <p:nvPr/>
         </p:nvSpPr>
         <p:spPr>
           <a:xfrm>
-            <a:off x="1508760" y="3931920"/>
+            <a:off x="1508760" y="4114800"/>
             <a:ext cx="2743200" cy="914400"/>
           </a:xfrm>
           <a:prstGeom prst="rect">
@@ -5346,7 +5621,7 @@
             <a:r>
               <a:rPr sz="1800" b="1" i="0">
                 <a:solidFill>
-                  <a:srgbClr val="113B5F"/>
+                  <a:srgbClr val="273949"/>
                 </a:solidFill>
               </a:rPr>
               <a:t>약속 3</a:t>
@@ -5356,13 +5631,13 @@
       </p:sp>
       <p:sp>
         <p:nvSpPr>
-          <p:cNvPr id="15" name="TextBox 14"/>
+          <p:cNvPr id="17" name="TextBox 16"/>
           <p:cNvSpPr txBox="1"/>
           <p:nvPr/>
         </p:nvSpPr>
         <p:spPr>
           <a:xfrm>
-            <a:off x="4297680" y="3931920"/>
+            <a:off x="4297680" y="4114800"/>
             <a:ext cx="7071055" cy="914400"/>
           </a:xfrm>
           <a:prstGeom prst="rect">
@@ -5384,7 +5659,7 @@
             <a:r>
               <a:rPr sz="1700" b="0" i="0">
                 <a:solidFill>
-                  <a:srgbClr val="2B2B2B"/>
+                  <a:srgbClr val="26231F"/>
                 </a:solidFill>
               </a:rPr>
               <a:t>주말에는 함께 산책하기</a:t>
@@ -5406,7 +5681,7 @@
     <p:bg>
       <p:bgPr>
         <a:solidFill>
-          <a:srgbClr val="EEF5FC"/>
+          <a:srgbClr val="FFFFFF"/>
         </a:solidFill>
         <a:effectLst/>
       </p:bgPr>
@@ -5425,18 +5700,15 @@
           <p:nvPr/>
         </p:nvSpPr>
         <p:spPr>
-          <a:xfrm rot="10800000">
-            <a:off x="10637215" y="0"/>
-            <a:ext cx="914400" cy="1554480"/>
-          </a:xfrm>
-          <a:prstGeom prst="round2SameRect">
-            <a:avLst>
-              <a:gd name="adj1" fmla="val 50000"/>
-              <a:gd name="adj2" fmla="val 0"/>
-            </a:avLst>
+          <a:xfrm>
+            <a:off x="640080" y="566928"/>
+            <a:ext cx="10911535" cy="10972"/>
+          </a:xfrm>
+          <a:prstGeom prst="rect">
+            <a:avLst/>
           </a:prstGeom>
           <a:solidFill>
-            <a:srgbClr val="D1E7FA"/>
+            <a:srgbClr val="26231F"/>
           </a:solidFill>
           <a:ln>
             <a:noFill/>
@@ -5452,6 +5724,73 @@
       </p:sp>
       <p:sp>
         <p:nvSpPr>
+          <p:cNvPr id="4" name="상단 라벨"/>
+          <p:cNvSpPr txBox="1"/>
+          <p:nvPr/>
+        </p:nvSpPr>
+        <p:spPr>
+          <a:xfrm>
+            <a:off x="640080" y="237744"/>
+            <a:ext cx="5486400" cy="274320"/>
+          </a:xfrm>
+          <a:prstGeom prst="rect">
+            <a:avLst/>
+          </a:prstGeom>
+          <a:noFill/>
+        </p:spPr>
+        <p:txBody>
+          <a:bodyPr wrap="square" lIns="54864" rIns="54864" tIns="27432" bIns="27432" anchor="ctr">
+            <a:noAutofit/>
+          </a:bodyPr>
+          <a:lstStyle/>
+          <a:p>
+            <a:pPr algn="l">
+              <a:lnSpc>
+                <a:spcPct val="115000"/>
+              </a:lnSpc>
+            </a:pPr>
+            <a:r>
+              <a:rPr sz="900" b="1" i="0" spc="250">
+                <a:solidFill>
+                  <a:srgbClr val="26231F"/>
+                </a:solidFill>
+              </a:rPr>
+              <a:t>FAMILY ALBUM</a:t>
+            </a:r>
+          </a:p>
+        </p:txBody>
+      </p:sp>
+      <p:sp>
+        <p:nvSpPr>
+          <p:cNvPr id="5" name="포인트"/>
+          <p:cNvSpPr/>
+          <p:nvPr/>
+        </p:nvSpPr>
+        <p:spPr>
+          <a:xfrm>
+            <a:off x="11204143" y="246888"/>
+            <a:ext cx="237744" cy="237744"/>
+          </a:xfrm>
+          <a:prstGeom prst="heart">
+            <a:avLst/>
+          </a:prstGeom>
+          <a:solidFill>
+            <a:srgbClr val="7BB6EA"/>
+          </a:solidFill>
+          <a:ln>
+            <a:noFill/>
+          </a:ln>
+        </p:spPr>
+        <p:txBody>
+          <a:bodyPr rtlCol="0" anchor="ctr"/>
+          <a:lstStyle/>
+          <a:p>
+            <a:pPr algn="ctr"/>
+          </a:p>
+        </p:txBody>
+      </p:sp>
+      <p:sp>
+        <p:nvSpPr>
           <p:cNvPr id="2" name="Title 1"/>
           <p:cNvSpPr>
             <a:spLocks noGrp="1"/>
@@ -5462,8 +5801,8 @@
         </p:nvSpPr>
         <p:spPr>
           <a:xfrm>
-            <a:off x="640080" y="457200"/>
-            <a:ext cx="9722815" cy="868680"/>
+            <a:off x="640080" y="731520"/>
+            <a:ext cx="10911535" cy="822960"/>
           </a:xfrm>
         </p:spPr>
         <p:txBody>
@@ -5480,7 +5819,7 @@
             <a:r>
               <a:rPr sz="3000" b="1" i="0">
                 <a:solidFill>
-                  <a:srgbClr val="113B5F"/>
+                  <a:srgbClr val="26231F"/>
                 </a:solidFill>
               </a:rPr>
               <a:t>가족 사진</a:t>
@@ -5490,14 +5829,14 @@
       </p:sp>
       <p:sp>
         <p:nvSpPr>
-          <p:cNvPr id="4" name="사진 자리"/>
+          <p:cNvPr id="6" name="사진 자리"/>
           <p:cNvSpPr/>
           <p:nvPr/>
         </p:nvSpPr>
         <p:spPr>
           <a:xfrm>
-            <a:off x="640080" y="1600200"/>
-            <a:ext cx="3515258" cy="2308860"/>
+            <a:off x="640080" y="1783080"/>
+            <a:ext cx="3515258" cy="2194560"/>
           </a:xfrm>
           <a:prstGeom prst="roundRect">
             <a:avLst>
@@ -5508,9 +5847,7 @@
             <a:srgbClr val="D1E7FA"/>
           </a:solidFill>
           <a:ln w="19050">
-            <a:solidFill>
-              <a:srgbClr val="267BC5"/>
-            </a:solidFill>
+            <a:noFill/>
             <a:prstDash val="dash"/>
           </a:ln>
         </p:spPr>
@@ -5528,7 +5865,7 @@
             <a:r>
               <a:rPr sz="1200" b="0" i="0">
                 <a:solidFill>
-                  <a:srgbClr val="113B5F"/>
+                  <a:srgbClr val="8E8780"/>
                 </a:solidFill>
               </a:rPr>
               <a:t>사진 1</a:t>
@@ -5538,14 +5875,14 @@
       </p:sp>
       <p:sp>
         <p:nvSpPr>
-          <p:cNvPr id="5" name="사진 자리"/>
+          <p:cNvPr id="7" name="사진 자리"/>
           <p:cNvSpPr/>
           <p:nvPr/>
         </p:nvSpPr>
         <p:spPr>
           <a:xfrm>
-            <a:off x="4338218" y="1600200"/>
-            <a:ext cx="3515258" cy="2308860"/>
+            <a:off x="4338218" y="1783080"/>
+            <a:ext cx="3515258" cy="2194560"/>
           </a:xfrm>
           <a:prstGeom prst="roundRect">
             <a:avLst>
@@ -5556,9 +5893,7 @@
             <a:srgbClr val="D1E7FA"/>
           </a:solidFill>
           <a:ln w="19050">
-            <a:solidFill>
-              <a:srgbClr val="267BC5"/>
-            </a:solidFill>
+            <a:noFill/>
             <a:prstDash val="dash"/>
           </a:ln>
         </p:spPr>
@@ -5576,7 +5911,7 @@
             <a:r>
               <a:rPr sz="1200" b="0" i="0">
                 <a:solidFill>
-                  <a:srgbClr val="113B5F"/>
+                  <a:srgbClr val="8E8780"/>
                 </a:solidFill>
               </a:rPr>
               <a:t>사진 2</a:t>
@@ -5586,14 +5921,14 @@
       </p:sp>
       <p:sp>
         <p:nvSpPr>
-          <p:cNvPr id="6" name="사진 자리"/>
+          <p:cNvPr id="8" name="사진 자리"/>
           <p:cNvSpPr/>
           <p:nvPr/>
         </p:nvSpPr>
         <p:spPr>
           <a:xfrm>
-            <a:off x="8036356" y="1600200"/>
-            <a:ext cx="3515258" cy="2308860"/>
+            <a:off x="8036356" y="1783080"/>
+            <a:ext cx="3515258" cy="2194560"/>
           </a:xfrm>
           <a:prstGeom prst="roundRect">
             <a:avLst>
@@ -5604,9 +5939,7 @@
             <a:srgbClr val="D1E7FA"/>
           </a:solidFill>
           <a:ln w="19050">
-            <a:solidFill>
-              <a:srgbClr val="267BC5"/>
-            </a:solidFill>
+            <a:noFill/>
             <a:prstDash val="dash"/>
           </a:ln>
         </p:spPr>
@@ -5624,7 +5957,7 @@
             <a:r>
               <a:rPr sz="1200" b="0" i="0">
                 <a:solidFill>
-                  <a:srgbClr val="113B5F"/>
+                  <a:srgbClr val="8E8780"/>
                 </a:solidFill>
               </a:rPr>
               <a:t>사진 3</a:t>
@@ -5634,14 +5967,14 @@
       </p:sp>
       <p:sp>
         <p:nvSpPr>
-          <p:cNvPr id="7" name="사진 자리"/>
+          <p:cNvPr id="9" name="사진 자리"/>
           <p:cNvSpPr/>
           <p:nvPr/>
         </p:nvSpPr>
         <p:spPr>
           <a:xfrm>
-            <a:off x="640080" y="4091939"/>
-            <a:ext cx="3515258" cy="2308860"/>
+            <a:off x="640080" y="4160520"/>
+            <a:ext cx="3515258" cy="2194560"/>
           </a:xfrm>
           <a:prstGeom prst="roundRect">
             <a:avLst>
@@ -5652,9 +5985,7 @@
             <a:srgbClr val="D1E7FA"/>
           </a:solidFill>
           <a:ln w="19050">
-            <a:solidFill>
-              <a:srgbClr val="267BC5"/>
-            </a:solidFill>
+            <a:noFill/>
             <a:prstDash val="dash"/>
           </a:ln>
         </p:spPr>
@@ -5672,7 +6003,7 @@
             <a:r>
               <a:rPr sz="1200" b="0" i="0">
                 <a:solidFill>
-                  <a:srgbClr val="113B5F"/>
+                  <a:srgbClr val="8E8780"/>
                 </a:solidFill>
               </a:rPr>
               <a:t>사진 4</a:t>
@@ -5682,14 +6013,14 @@
       </p:sp>
       <p:sp>
         <p:nvSpPr>
-          <p:cNvPr id="8" name="사진 자리"/>
+          <p:cNvPr id="10" name="사진 자리"/>
           <p:cNvSpPr/>
           <p:nvPr/>
         </p:nvSpPr>
         <p:spPr>
           <a:xfrm>
-            <a:off x="4338218" y="4091939"/>
-            <a:ext cx="3515258" cy="2308860"/>
+            <a:off x="4338218" y="4160520"/>
+            <a:ext cx="3515258" cy="2194560"/>
           </a:xfrm>
           <a:prstGeom prst="roundRect">
             <a:avLst>
@@ -5700,9 +6031,7 @@
             <a:srgbClr val="D1E7FA"/>
           </a:solidFill>
           <a:ln w="19050">
-            <a:solidFill>
-              <a:srgbClr val="267BC5"/>
-            </a:solidFill>
+            <a:noFill/>
             <a:prstDash val="dash"/>
           </a:ln>
         </p:spPr>
@@ -5720,7 +6049,7 @@
             <a:r>
               <a:rPr sz="1200" b="0" i="0">
                 <a:solidFill>
-                  <a:srgbClr val="113B5F"/>
+                  <a:srgbClr val="8E8780"/>
                 </a:solidFill>
               </a:rPr>
               <a:t>사진 5</a:t>
@@ -5730,14 +6059,14 @@
       </p:sp>
       <p:sp>
         <p:nvSpPr>
-          <p:cNvPr id="9" name="사진 자리"/>
+          <p:cNvPr id="11" name="사진 자리"/>
           <p:cNvSpPr/>
           <p:nvPr/>
         </p:nvSpPr>
         <p:spPr>
           <a:xfrm>
-            <a:off x="8036356" y="4091939"/>
-            <a:ext cx="3515258" cy="2308860"/>
+            <a:off x="8036356" y="4160520"/>
+            <a:ext cx="3515258" cy="2194560"/>
           </a:xfrm>
           <a:prstGeom prst="roundRect">
             <a:avLst>
@@ -5748,9 +6077,7 @@
             <a:srgbClr val="D1E7FA"/>
           </a:solidFill>
           <a:ln w="19050">
-            <a:solidFill>
-              <a:srgbClr val="267BC5"/>
-            </a:solidFill>
+            <a:noFill/>
             <a:prstDash val="dash"/>
           </a:ln>
         </p:spPr>
@@ -5768,7 +6095,7 @@
             <a:r>
               <a:rPr sz="1200" b="0" i="0">
                 <a:solidFill>
-                  <a:srgbClr val="113B5F"/>
+                  <a:srgbClr val="8E8780"/>
                 </a:solidFill>
               </a:rPr>
               <a:t>사진 6</a:t>
@@ -5787,6 +6114,14 @@
 <file path=ppt/slides/slide6.xml><?xml version="1.0" encoding="utf-8"?>
 <p:sld xmlns:a="http://schemas.openxmlformats.org/drawingml/2006/main" xmlns:p="http://schemas.openxmlformats.org/presentationml/2006/main" xmlns:r="http://schemas.openxmlformats.org/officeDocument/2006/relationships">
   <p:cSld>
+    <p:bg>
+      <p:bgPr>
+        <a:solidFill>
+          <a:srgbClr val="EAF4FD"/>
+        </a:solidFill>
+        <a:effectLst/>
+      </p:bgPr>
+    </p:bg>
     <p:spTree>
       <p:nvGrpSpPr>
         <p:cNvPr id="1" name=""/>
@@ -5794,30 +6129,119 @@
         <p:nvPr/>
       </p:nvGrpSpPr>
       <p:grpSpPr/>
-      <p:pic>
-        <p:nvPicPr>
-          <p:cNvPr id="3" name="표지 그림" descr="family-22.jpg"/>
-          <p:cNvPicPr>
-            <a:picLocks noChangeAspect="1"/>
-          </p:cNvPicPr>
-          <p:nvPr/>
-        </p:nvPicPr>
-        <p:blipFill>
-          <a:blip r:embed="rId2"/>
-          <a:stretch>
-            <a:fillRect/>
-          </a:stretch>
-        </p:blipFill>
-        <p:spPr>
-          <a:xfrm>
-            <a:off x="0" y="0"/>
-            <a:ext cx="12191695" cy="6858000"/>
+      <p:sp>
+        <p:nvSpPr>
+          <p:cNvPr id="3" name="사진 자리"/>
+          <p:cNvSpPr/>
+          <p:nvPr/>
+        </p:nvSpPr>
+        <p:spPr>
+          <a:xfrm>
+            <a:off x="1463003" y="685800"/>
+            <a:ext cx="3169840" cy="5486400"/>
+          </a:xfrm>
+          <a:prstGeom prst="round2SameRect">
+            <a:avLst>
+              <a:gd name="adj1" fmla="val 50000"/>
+              <a:gd name="adj2" fmla="val 0"/>
+            </a:avLst>
+          </a:prstGeom>
+          <a:solidFill>
+            <a:srgbClr val="A5CFF3"/>
+          </a:solidFill>
+          <a:ln>
+            <a:noFill/>
+          </a:ln>
+        </p:spPr>
+        <p:txBody>
+          <a:bodyPr rtlCol="0" anchor="ctr" wrap="square" lIns="54864" rIns="54864" tIns="27432" bIns="27432">
+            <a:noAutofit/>
+          </a:bodyPr>
+          <a:lstStyle/>
+          <a:p>
+            <a:pPr algn="ctr">
+              <a:lnSpc>
+                <a:spcPct val="100000"/>
+              </a:lnSpc>
+            </a:pPr>
+            <a:r>
+              <a:rPr sz="1400" b="0" i="0">
+                <a:solidFill>
+                  <a:srgbClr val="273949"/>
+                </a:solidFill>
+              </a:rPr>
+              <a:t>사진을 넣어 주세요</a:t>
+            </a:r>
+          </a:p>
+        </p:txBody>
+      </p:sp>
+      <p:sp>
+        <p:nvSpPr>
+          <p:cNvPr id="4" name="장식"/>
+          <p:cNvSpPr/>
+          <p:nvPr/>
+        </p:nvSpPr>
+        <p:spPr>
+          <a:xfrm>
+            <a:off x="4358505" y="4251960"/>
+            <a:ext cx="1005840" cy="1005840"/>
+          </a:xfrm>
+          <a:prstGeom prst="ellipse">
+            <a:avLst/>
+          </a:prstGeom>
+          <a:solidFill>
+            <a:srgbClr val="A5CFF3"/>
+          </a:solidFill>
+          <a:ln>
+            <a:noFill/>
+          </a:ln>
+        </p:spPr>
+        <p:txBody>
+          <a:bodyPr rtlCol="0" anchor="ctr"/>
+          <a:lstStyle/>
+          <a:p>
+            <a:pPr algn="ctr"/>
+          </a:p>
+        </p:txBody>
+      </p:sp>
+      <p:sp>
+        <p:nvSpPr>
+          <p:cNvPr id="5" name="라벨"/>
+          <p:cNvSpPr txBox="1"/>
+          <p:nvPr/>
+        </p:nvSpPr>
+        <p:spPr>
+          <a:xfrm>
+            <a:off x="6827349" y="2148840"/>
+            <a:ext cx="4632844" cy="274320"/>
           </a:xfrm>
           <a:prstGeom prst="rect">
             <a:avLst/>
           </a:prstGeom>
-        </p:spPr>
-      </p:pic>
+          <a:noFill/>
+        </p:spPr>
+        <p:txBody>
+          <a:bodyPr wrap="square" lIns="54864" rIns="54864" tIns="27432" bIns="27432" anchor="t">
+            <a:noAutofit/>
+          </a:bodyPr>
+          <a:lstStyle/>
+          <a:p>
+            <a:pPr algn="l">
+              <a:lnSpc>
+                <a:spcPct val="115000"/>
+              </a:lnSpc>
+            </a:pPr>
+            <a:r>
+              <a:rPr sz="1000" b="1" i="0" spc="250">
+                <a:solidFill>
+                  <a:srgbClr val="26231F"/>
+                </a:solidFill>
+              </a:rPr>
+              <a:t>FAMILY ALBUM</a:t>
+            </a:r>
+          </a:p>
+        </p:txBody>
+      </p:sp>
       <p:sp>
         <p:nvSpPr>
           <p:cNvPr id="2" name="Title 1"/>
@@ -5830,8 +6254,8 @@
         </p:nvSpPr>
         <p:spPr>
           <a:xfrm>
-            <a:off x="853418" y="2057400"/>
-            <a:ext cx="6095847" cy="1554480"/>
+            <a:off x="6827349" y="2606040"/>
+            <a:ext cx="4632844" cy="1188720"/>
           </a:xfrm>
         </p:spPr>
         <p:txBody>
@@ -5846,9 +6270,9 @@
               </a:lnSpc>
             </a:pPr>
             <a:r>
-              <a:rPr sz="3600" b="1" i="0">
-                <a:solidFill>
-                  <a:srgbClr val="113B5F"/>
+              <a:rPr sz="4000" b="1" i="0">
+                <a:solidFill>
+                  <a:srgbClr val="26231F"/>
                 </a:solidFill>
               </a:rPr>
               <a:t>우리 가족 소개를 마칩니다</a:t>
@@ -5858,14 +6282,14 @@
       </p:sp>
       <p:sp>
         <p:nvSpPr>
-          <p:cNvPr id="4" name="한 줄 문구"/>
+          <p:cNvPr id="6" name="한 줄 문구"/>
           <p:cNvSpPr txBox="1"/>
           <p:nvPr/>
         </p:nvSpPr>
         <p:spPr>
           <a:xfrm>
-            <a:off x="853418" y="3749039"/>
-            <a:ext cx="6095847" cy="822960"/>
+            <a:off x="6827349" y="3886200"/>
+            <a:ext cx="4632844" cy="822960"/>
           </a:xfrm>
           <a:prstGeom prst="rect">
             <a:avLst/>
@@ -5884,9 +6308,9 @@
               </a:lnSpc>
             </a:pPr>
             <a:r>
-              <a:rPr sz="1700" b="0" i="1">
-                <a:solidFill>
-                  <a:srgbClr val="113B5F"/>
+              <a:rPr sz="1700" b="0" i="0">
+                <a:solidFill>
+                  <a:srgbClr val="26231F"/>
                 </a:solidFill>
               </a:rPr>
               <a:t>읽어 주셔서 고맙습니다</a:t>
@@ -5896,14 +6320,14 @@
       </p:sp>
       <p:sp>
         <p:nvSpPr>
-          <p:cNvPr id="5" name="안내 문구"/>
+          <p:cNvPr id="7" name="안내 문구"/>
           <p:cNvSpPr txBox="1"/>
           <p:nvPr/>
         </p:nvSpPr>
         <p:spPr>
           <a:xfrm>
-            <a:off x="853418" y="4617720"/>
-            <a:ext cx="6095847" cy="914400"/>
+            <a:off x="6827349" y="4754880"/>
+            <a:ext cx="4632844" cy="914400"/>
           </a:xfrm>
           <a:prstGeom prst="rect">
             <a:avLst/>
@@ -5924,7 +6348,7 @@
             <a:r>
               <a:rPr sz="1400" b="0" i="0">
                 <a:solidFill>
-                  <a:srgbClr val="666666"/>
+                  <a:srgbClr val="26231F"/>
                 </a:solidFill>
               </a:rPr>
               <a:t>고맙습니다 · 가족 이름</a:t>
@@ -5951,34 +6375,34 @@
         <a:sysClr val="window" lastClr="FFFFFF"/>
       </a:lt1>
       <a:dk2>
-        <a:srgbClr val="113B5F"/>
+        <a:srgbClr val="273949"/>
       </a:dk2>
       <a:lt2>
-        <a:srgbClr val="EEF5FC"/>
+        <a:srgbClr val="EAF4FD"/>
       </a:lt2>
       <a:accent1>
-        <a:srgbClr val="267BC5"/>
+        <a:srgbClr val="7BB6EA"/>
       </a:accent1>
       <a:accent2>
-        <a:srgbClr val="209DB6"/>
+        <a:srgbClr val="9FA4EF"/>
       </a:accent2>
       <a:accent3>
-        <a:srgbClr val="113B5F"/>
+        <a:srgbClr val="273949"/>
       </a:accent3>
       <a:accent4>
         <a:srgbClr val="D1E7FA"/>
       </a:accent4>
       <a:accent5>
-        <a:srgbClr val="238CBE"/>
+        <a:srgbClr val="8DADEC"/>
       </a:accent5>
       <a:accent6>
-        <a:srgbClr val="70899F"/>
+        <a:srgbClr val="7D8892"/>
       </a:accent6>
       <a:hlink>
-        <a:srgbClr val="267BC5"/>
+        <a:srgbClr val="7BB6EA"/>
       </a:hlink>
       <a:folHlink>
-        <a:srgbClr val="113B5F"/>
+        <a:srgbClr val="273949"/>
       </a:folHlink>
     </a:clrScheme>
     <a:fontScheme name="Office">
